--- a/system-design-101/vi/lessons/sd-13-022/slides/sd-13-022.pptx
+++ b/system-design-101/vi/lessons/sd-13-022/slides/sd-13-022.pptx
@@ -1807,17 +1807,17 @@
           <a:ln/>
         </p:spPr>
         <p:txBody>
-          <a:bodyPr wrap="square" lIns="0" tIns="66675" rIns="0" bIns="-66675" rtlCol="0" anchor="t"/>
+          <a:bodyPr wrap="square" lIns="0" tIns="72009" rIns="0" bIns="-72009" rtlCol="0" anchor="t"/>
           <a:lstStyle/>
           <a:p>
             <a:pPr algn="l" indent="0" marL="0">
               <a:lnSpc>
-                <a:spcPts val="7800"/>
+                <a:spcPts val="8424"/>
               </a:lnSpc>
               <a:buNone/>
             </a:pPr>
             <a:r>
-              <a:rPr lang="en-US" sz="7500" dirty="0" spc="-1" kern="0">
+              <a:rPr lang="en-US" sz="8100" dirty="0" spc="4" kern="0">
                 <a:solidFill>
                   <a:srgbClr val="F3EEE3"/>
                 </a:solidFill>
@@ -1828,7 +1828,7 @@
               <a:t>Tìm</a:t>
             </a:r>
             <a:r>
-              <a:rPr lang="en-US" sz="7500" dirty="0" spc="5" kern="0">
+              <a:rPr lang="en-US" sz="8100" dirty="0" spc="2" kern="0">
                 <a:solidFill>
                   <a:srgbClr val="F3EEE3"/>
                 </a:solidFill>
@@ -1839,7 +1839,7 @@
               <a:t> nguyên</a:t>
             </a:r>
             <a:r>
-              <a:rPr lang="en-US" sz="7500" dirty="0" spc="0" kern="0">
+              <a:rPr lang="en-US" sz="8100" dirty="0" spc="0" kern="0">
                 <a:solidFill>
                   <a:srgbClr val="F3EEE3"/>
                 </a:solidFill>
@@ -1847,10 +1847,10 @@
                 <a:ea typeface="Bricolage Grotesque ExtraBold" pitchFamily="34" charset="-122"/>
                 <a:cs typeface="Bricolage Grotesque ExtraBold" pitchFamily="34" charset="-120"/>
               </a:rPr>
-              <a:t> nhân</a:t>
-            </a:r>
-            <a:r>
-              <a:rPr lang="en-US" sz="7500" dirty="0" spc="-2" kern="0">
+              <a:t> nhân từ nhật</a:t>
+            </a:r>
+            <a:r>
+              <a:rPr lang="en-US" sz="8100" dirty="0" spc="-2" kern="0">
                 <a:solidFill>
                   <a:srgbClr val="F3EEE3"/>
                 </a:solidFill>
@@ -1858,10 +1858,10 @@
                 <a:ea typeface="Bricolage Grotesque ExtraBold" pitchFamily="34" charset="-122"/>
                 <a:cs typeface="Bricolage Grotesque ExtraBold" pitchFamily="34" charset="-120"/>
               </a:rPr>
-              <a:t> từ</a:t>
-            </a:r>
-            <a:r>
-              <a:rPr lang="en-US" sz="7500" dirty="0" spc="-1" kern="0">
+              <a:t> ký</a:t>
+            </a:r>
+            <a:r>
+              <a:rPr lang="en-US" sz="8100" dirty="0" spc="-4" kern="0">
                 <a:solidFill>
                   <a:srgbClr val="F3EEE3"/>
                 </a:solidFill>
@@ -1869,10 +1869,10 @@
                 <a:ea typeface="Bricolage Grotesque ExtraBold" pitchFamily="34" charset="-122"/>
                 <a:cs typeface="Bricolage Grotesque ExtraBold" pitchFamily="34" charset="-120"/>
               </a:rPr>
-              <a:t> nhật</a:t>
-            </a:r>
-            <a:r>
-              <a:rPr lang="en-US" sz="7500" dirty="0" spc="0" kern="0">
+              <a:t> bằng</a:t>
+            </a:r>
+            <a:r>
+              <a:rPr lang="en-US" sz="8100" dirty="0" spc="0" kern="0">
                 <a:solidFill>
                   <a:srgbClr val="F3EEE3"/>
                 </a:solidFill>
@@ -1880,10 +1880,10 @@
                 <a:ea typeface="Bricolage Grotesque ExtraBold" pitchFamily="34" charset="-122"/>
                 <a:cs typeface="Bricolage Grotesque ExtraBold" pitchFamily="34" charset="-120"/>
               </a:rPr>
-              <a:t> ký</a:t>
-            </a:r>
-            <a:r>
-              <a:rPr lang="en-US" sz="7500" dirty="0" spc="-4" kern="0">
+              <a:t> dòng</a:t>
+            </a:r>
+            <a:r>
+              <a:rPr lang="en-US" sz="8100" dirty="0" spc="2" kern="0">
                 <a:solidFill>
                   <a:srgbClr val="F3EEE3"/>
                 </a:solidFill>
@@ -1891,31 +1891,9 @@
                 <a:ea typeface="Bricolage Grotesque ExtraBold" pitchFamily="34" charset="-122"/>
                 <a:cs typeface="Bricolage Grotesque ExtraBold" pitchFamily="34" charset="-120"/>
               </a:rPr>
-              <a:t> bằng</a:t>
-            </a:r>
-            <a:r>
-              <a:rPr lang="en-US" sz="7500" dirty="0" spc="1" kern="0">
-                <a:solidFill>
-                  <a:srgbClr val="F3EEE3"/>
-                </a:solidFill>
-                <a:latin typeface="Bricolage Grotesque ExtraBold" pitchFamily="34" charset="0"/>
-                <a:ea typeface="Bricolage Grotesque ExtraBold" pitchFamily="34" charset="-122"/>
-                <a:cs typeface="Bricolage Grotesque ExtraBold" pitchFamily="34" charset="-120"/>
-              </a:rPr>
-              <a:t> dòng</a:t>
-            </a:r>
-            <a:r>
-              <a:rPr lang="en-US" sz="7500" dirty="0" spc="5" kern="0">
-                <a:solidFill>
-                  <a:srgbClr val="F3EEE3"/>
-                </a:solidFill>
-                <a:latin typeface="Bricolage Grotesque ExtraBold" pitchFamily="34" charset="0"/>
-                <a:ea typeface="Bricolage Grotesque ExtraBold" pitchFamily="34" charset="-122"/>
-                <a:cs typeface="Bricolage Grotesque ExtraBold" pitchFamily="34" charset="-120"/>
-              </a:rPr>
               <a:t> lệnh</a:t>
             </a:r>
-            <a:endParaRPr lang="en-US" sz="7500" dirty="0"/>
+            <a:endParaRPr lang="en-US" sz="8100" dirty="0"/>
           </a:p>
         </p:txBody>
       </p:sp>
@@ -2096,7 +2074,7 @@
               <a:t> nhóm</a:t>
             </a:r>
             <a:r>
-              <a:rPr lang="en-US" sz="1650" dirty="0" spc="-3" kern="0">
+              <a:rPr lang="en-US" sz="1650" dirty="0" spc="-4" kern="0">
                 <a:solidFill>
                   <a:srgbClr val="9AA0B5"/>
                 </a:solidFill>
@@ -2104,10 +2082,10 @@
                 <a:ea typeface="Be Vietnam Pro" pitchFamily="34" charset="-122"/>
                 <a:cs typeface="Be Vietnam Pro" pitchFamily="34" charset="-120"/>
               </a:rPr>
-              <a:t> Quan</a:t>
-            </a:r>
-            <a:r>
-              <a:rPr lang="en-US" sz="1650" dirty="0" spc="-9" kern="0">
+              <a:t> DevOps</a:t>
+            </a:r>
+            <a:r>
+              <a:rPr lang="en-US" sz="1650" dirty="0" spc="-7" kern="0">
                 <a:solidFill>
                   <a:srgbClr val="9AA0B5"/>
                 </a:solidFill>
@@ -2115,7 +2093,7 @@
                 <a:ea typeface="Be Vietnam Pro" pitchFamily="34" charset="-122"/>
                 <a:cs typeface="Be Vietnam Pro" pitchFamily="34" charset="-120"/>
               </a:rPr>
-              <a:t> sát</a:t>
+              <a:t> và</a:t>
             </a:r>
             <a:r>
               <a:rPr lang="en-US" sz="1650" dirty="0" spc="3" kern="0">
@@ -2126,18 +2104,7 @@
                 <a:ea typeface="Be Vietnam Pro" pitchFamily="34" charset="-122"/>
                 <a:cs typeface="Be Vietnam Pro" pitchFamily="34" charset="-120"/>
               </a:rPr>
-              <a:t> hệ</a:t>
-            </a:r>
-            <a:r>
-              <a:rPr lang="en-US" sz="1650" dirty="0" spc="1" kern="0">
-                <a:solidFill>
-                  <a:srgbClr val="9AA0B5"/>
-                </a:solidFill>
-                <a:latin typeface="Be Vietnam Pro" pitchFamily="34" charset="0"/>
-                <a:ea typeface="Be Vietnam Pro" pitchFamily="34" charset="-122"/>
-                <a:cs typeface="Be Vietnam Pro" pitchFamily="34" charset="-120"/>
-              </a:rPr>
-              <a:t> thống</a:t>
+              <a:t> CI/CD</a:t>
             </a:r>
             <a:endParaRPr lang="en-US" sz="1650" dirty="0"/>
           </a:p>
@@ -4284,7 +4251,7 @@
         <p:spPr>
           <a:xfrm>
             <a:off x="914400" y="1333500"/>
-            <a:ext cx="16459200" cy="1238250"/>
+            <a:ext cx="16459200" cy="1047750"/>
           </a:xfrm>
           <a:prstGeom prst="rect">
             <a:avLst/>
@@ -4300,7 +4267,7 @@
               <a:buNone/>
             </a:pPr>
             <a:r>
-              <a:rPr lang="en-US" sz="6600" dirty="0" spc="1" kern="0">
+              <a:rPr lang="en-US" sz="6900" dirty="0" spc="-1" kern="0">
                 <a:solidFill>
                   <a:srgbClr val="14161C"/>
                 </a:solidFill>
@@ -4311,7 +4278,7 @@
               <a:t>Hỏi</a:t>
             </a:r>
             <a:r>
-              <a:rPr lang="en-US" sz="6600" dirty="0" spc="-19" kern="0">
+              <a:rPr lang="en-US" sz="6900" dirty="0" spc="-19" kern="0">
                 <a:solidFill>
                   <a:srgbClr val="14161C"/>
                 </a:solidFill>
@@ -4322,7 +4289,7 @@
               <a:t> tệp</a:t>
             </a:r>
             <a:r>
-              <a:rPr lang="en-US" sz="6600" dirty="0" spc="-1" kern="0">
+              <a:rPr lang="en-US" sz="6900" dirty="0" spc="1" kern="0">
                 <a:solidFill>
                   <a:srgbClr val="14161C"/>
                 </a:solidFill>
@@ -4333,7 +4300,7 @@
               <a:t> nhật</a:t>
             </a:r>
             <a:r>
-              <a:rPr lang="en-US" sz="6600" dirty="0" spc="-3" kern="0">
+              <a:rPr lang="en-US" sz="6900" dirty="0" spc="-4" kern="0">
                 <a:solidFill>
                   <a:srgbClr val="14161C"/>
                 </a:solidFill>
@@ -4344,7 +4311,7 @@
               <a:t> ký</a:t>
             </a:r>
             <a:r>
-              <a:rPr lang="en-US" sz="6600" dirty="0" spc="2" kern="0">
+              <a:rPr lang="en-US" sz="6900" dirty="0" spc="1" kern="0">
                 <a:solidFill>
                   <a:srgbClr val="14161C"/>
                 </a:solidFill>
@@ -4355,7 +4322,7 @@
               <a:t> bốn</a:t>
             </a:r>
             <a:r>
-              <a:rPr lang="en-US" sz="6600" dirty="0" spc="-2" kern="0">
+              <a:rPr lang="en-US" sz="6900" dirty="0" spc="-1" kern="0">
                 <a:solidFill>
                   <a:srgbClr val="14161C"/>
                 </a:solidFill>
@@ -4366,7 +4333,7 @@
               <a:t> câu</a:t>
             </a:r>
             <a:r>
-              <a:rPr lang="en-US" sz="6600" dirty="0" spc="-73" kern="0">
+              <a:rPr lang="en-US" sz="6900" dirty="0" spc="-79" kern="0">
                 <a:solidFill>
                   <a:srgbClr val="14161C"/>
                 </a:solidFill>
@@ -4376,7 +4343,7 @@
               </a:rPr>
               <a:t> trước</a:t>
             </a:r>
-            <a:endParaRPr lang="en-US" sz="6600" dirty="0"/>
+            <a:endParaRPr lang="en-US" sz="6900" dirty="0"/>
           </a:p>
         </p:txBody>
       </p:sp>
@@ -8295,7 +8262,7 @@
         <p:spPr>
           <a:xfrm>
             <a:off x="914400" y="1333500"/>
-            <a:ext cx="16459200" cy="1238250"/>
+            <a:ext cx="16459200" cy="1047750"/>
           </a:xfrm>
           <a:prstGeom prst="rect">
             <a:avLst/>
@@ -8311,7 +8278,7 @@
               <a:buNone/>
             </a:pPr>
             <a:r>
-              <a:rPr lang="en-US" sz="6600" dirty="0" spc="-1" kern="0">
+              <a:rPr lang="en-US" sz="6900" dirty="0" spc="-3" kern="0">
                 <a:solidFill>
                   <a:srgbClr val="F3EEE3"/>
                 </a:solidFill>
@@ -8322,7 +8289,7 @@
               <a:t>jq</a:t>
             </a:r>
             <a:r>
-              <a:rPr lang="en-US" sz="6600" dirty="0" spc="2" kern="0">
+              <a:rPr lang="en-US" sz="6900" dirty="0" spc="8" kern="0">
                 <a:solidFill>
                   <a:srgbClr val="F3EEE3"/>
                 </a:solidFill>
@@ -8333,7 +8300,7 @@
               <a:t> hiểu</a:t>
             </a:r>
             <a:r>
-              <a:rPr lang="en-US" sz="6600" dirty="0" spc="-1" kern="0">
+              <a:rPr lang="en-US" sz="6900" dirty="0" spc="-1" kern="0">
                 <a:solidFill>
                   <a:srgbClr val="F3EEE3"/>
                 </a:solidFill>
@@ -8344,7 +8311,7 @@
               <a:t> cấu</a:t>
             </a:r>
             <a:r>
-              <a:rPr lang="en-US" sz="6600" dirty="0" spc="6" kern="0">
+              <a:rPr lang="en-US" sz="6900" dirty="0" spc="5" kern="0">
                 <a:solidFill>
                   <a:srgbClr val="F3EEE3"/>
                 </a:solidFill>
@@ -8355,7 +8322,7 @@
               <a:t> trúc,</a:t>
             </a:r>
             <a:r>
-              <a:rPr lang="en-US" sz="6600" dirty="0" spc="-1" kern="0">
+              <a:rPr lang="en-US" sz="6900" dirty="0" spc="0" kern="0">
                 <a:solidFill>
                   <a:srgbClr val="F3EEE3"/>
                 </a:solidFill>
@@ -8363,10 +8330,10 @@
                 <a:ea typeface="Bricolage Grotesque ExtraBold" pitchFamily="34" charset="-122"/>
                 <a:cs typeface="Bricolage Grotesque ExtraBold" pitchFamily="34" charset="-120"/>
               </a:rPr>
-              <a:t> không</a:t>
-            </a:r>
-            <a:r>
-              <a:rPr lang="en-US" sz="6600" dirty="0" spc="1" kern="0">
+              <a:t> không cắt</a:t>
+            </a:r>
+            <a:r>
+              <a:rPr lang="en-US" sz="6900" dirty="0" spc="1" kern="0">
                 <a:solidFill>
                   <a:srgbClr val="F3EEE3"/>
                 </a:solidFill>
@@ -8374,20 +8341,9 @@
                 <a:ea typeface="Bricolage Grotesque ExtraBold" pitchFamily="34" charset="-122"/>
                 <a:cs typeface="Bricolage Grotesque ExtraBold" pitchFamily="34" charset="-120"/>
               </a:rPr>
-              <a:t> cắt</a:t>
-            </a:r>
-            <a:r>
-              <a:rPr lang="en-US" sz="6600" dirty="0" spc="-1" kern="0">
-                <a:solidFill>
-                  <a:srgbClr val="F3EEE3"/>
-                </a:solidFill>
-                <a:latin typeface="Bricolage Grotesque ExtraBold" pitchFamily="34" charset="0"/>
-                <a:ea typeface="Bricolage Grotesque ExtraBold" pitchFamily="34" charset="-122"/>
-                <a:cs typeface="Bricolage Grotesque ExtraBold" pitchFamily="34" charset="-120"/>
-              </a:rPr>
               <a:t> chuỗi</a:t>
             </a:r>
-            <a:endParaRPr lang="en-US" sz="6600" dirty="0"/>
+            <a:endParaRPr lang="en-US" sz="6900" dirty="0"/>
           </a:p>
         </p:txBody>
       </p:sp>
@@ -9635,7 +9591,7 @@
         <p:spPr>
           <a:xfrm>
             <a:off x="914400" y="1333500"/>
-            <a:ext cx="16459200" cy="1143000"/>
+            <a:ext cx="16459200" cy="1047750"/>
           </a:xfrm>
           <a:prstGeom prst="rect">
             <a:avLst/>
@@ -9651,7 +9607,7 @@
               <a:buNone/>
             </a:pPr>
             <a:r>
-              <a:rPr lang="en-US" sz="6600" dirty="0" spc="-52" kern="0">
+              <a:rPr lang="en-US" sz="6900" dirty="0" spc="-53" kern="0">
                 <a:solidFill>
                   <a:srgbClr val="14161C"/>
                 </a:solidFill>
@@ -9662,7 +9618,7 @@
               <a:t>awk</a:t>
             </a:r>
             <a:r>
-              <a:rPr lang="en-US" sz="6600" dirty="0" spc="-1" kern="0">
+              <a:rPr lang="en-US" sz="6900" dirty="0" spc="2" kern="0">
                 <a:solidFill>
                   <a:srgbClr val="14161C"/>
                 </a:solidFill>
@@ -9673,7 +9629,7 @@
               <a:t> tính</a:t>
             </a:r>
             <a:r>
-              <a:rPr lang="en-US" sz="6600" dirty="0" spc="6" kern="0">
+              <a:rPr lang="en-US" sz="6900" dirty="0" spc="7" kern="0">
                 <a:solidFill>
                   <a:srgbClr val="14161C"/>
                 </a:solidFill>
@@ -9684,7 +9640,7 @@
               <a:t> trung</a:t>
             </a:r>
             <a:r>
-              <a:rPr lang="en-US" sz="6600" dirty="0" spc="-18" kern="0">
+              <a:rPr lang="en-US" sz="6900" dirty="0" spc="-18" kern="0">
                 <a:solidFill>
                   <a:srgbClr val="14161C"/>
                 </a:solidFill>
@@ -9695,7 +9651,7 @@
               <a:t> bình</a:t>
             </a:r>
             <a:r>
-              <a:rPr lang="en-US" sz="6600" dirty="0" spc="-9" kern="0">
+              <a:rPr lang="en-US" sz="6900" dirty="0" spc="-11" kern="0">
                 <a:solidFill>
                   <a:srgbClr val="14161C"/>
                 </a:solidFill>
@@ -9706,7 +9662,7 @@
               <a:t> cột</a:t>
             </a:r>
             <a:r>
-              <a:rPr lang="en-US" sz="6600" dirty="0" spc="1" kern="0">
+              <a:rPr lang="en-US" sz="6900" dirty="0" spc="0" kern="0">
                 <a:solidFill>
                   <a:srgbClr val="14161C"/>
                 </a:solidFill>
@@ -9717,7 +9673,7 @@
               <a:t> thứ</a:t>
             </a:r>
             <a:r>
-              <a:rPr lang="en-US" sz="6600" dirty="0" spc="0" kern="0">
+              <a:rPr lang="en-US" sz="6900" dirty="0" spc="1" kern="0">
                 <a:solidFill>
                   <a:srgbClr val="14161C"/>
                 </a:solidFill>
@@ -9727,7 +9683,7 @@
               </a:rPr>
               <a:t> năm</a:t>
             </a:r>
-            <a:endParaRPr lang="en-US" sz="6600" dirty="0"/>
+            <a:endParaRPr lang="en-US" sz="6900" dirty="0"/>
           </a:p>
         </p:txBody>
       </p:sp>
@@ -12090,7 +12046,7 @@
         <p:spPr>
           <a:xfrm>
             <a:off x="914400" y="1333500"/>
-            <a:ext cx="16459200" cy="1238250"/>
+            <a:ext cx="16459200" cy="1047750"/>
           </a:xfrm>
           <a:prstGeom prst="rect">
             <a:avLst/>
@@ -12106,7 +12062,7 @@
               <a:buNone/>
             </a:pPr>
             <a:r>
-              <a:rPr lang="en-US" sz="5700" dirty="0" spc="0" kern="0">
+              <a:rPr lang="en-US" sz="6900" dirty="0" spc="1" kern="0">
                 <a:solidFill>
                   <a:srgbClr val="14161C"/>
                 </a:solidFill>
@@ -12117,7 +12073,7 @@
               <a:t>Khi</a:t>
             </a:r>
             <a:r>
-              <a:rPr lang="en-US" sz="5700" dirty="0" spc="-1" kern="0">
+              <a:rPr lang="en-US" sz="6900" dirty="0" spc="2" kern="0">
                 <a:solidFill>
                   <a:srgbClr val="14161C"/>
                 </a:solidFill>
@@ -12128,7 +12084,7 @@
               <a:t> nào</a:t>
             </a:r>
             <a:r>
-              <a:rPr lang="en-US" sz="5700" dirty="0" spc="-12" kern="0">
+              <a:rPr lang="en-US" sz="6900" dirty="0" spc="-13" kern="0">
                 <a:solidFill>
                   <a:srgbClr val="14161C"/>
                 </a:solidFill>
@@ -12139,7 +12095,7 @@
               <a:t> grep</a:t>
             </a:r>
             <a:r>
-              <a:rPr lang="en-US" sz="5700" dirty="0" spc="-2" kern="0">
+              <a:rPr lang="en-US" sz="6900" dirty="0" spc="-2" kern="0">
                 <a:solidFill>
                   <a:srgbClr val="14161C"/>
                 </a:solidFill>
@@ -12150,7 +12106,7 @@
               <a:t> cần</a:t>
             </a:r>
             <a:r>
-              <a:rPr lang="en-US" sz="5700" dirty="0" spc="-4" kern="0">
+              <a:rPr lang="en-US" sz="6900" dirty="0" spc="-3" kern="0">
                 <a:solidFill>
                   <a:srgbClr val="14161C"/>
                 </a:solidFill>
@@ -12160,7 +12116,7 @@
               </a:rPr>
               <a:t> --line-buffered?</a:t>
             </a:r>
-            <a:endParaRPr lang="en-US" sz="5700" dirty="0"/>
+            <a:endParaRPr lang="en-US" sz="6900" dirty="0"/>
           </a:p>
         </p:txBody>
       </p:sp>
@@ -13348,7 +13304,7 @@
         <p:spPr>
           <a:xfrm>
             <a:off x="914400" y="1333500"/>
-            <a:ext cx="16459200" cy="1143000"/>
+            <a:ext cx="16459200" cy="1047750"/>
           </a:xfrm>
           <a:prstGeom prst="rect">
             <a:avLst/>
@@ -13364,7 +13320,7 @@
               <a:buNone/>
             </a:pPr>
             <a:r>
-              <a:rPr lang="en-US" sz="6600" dirty="0" spc="1" kern="0">
+              <a:rPr lang="en-US" sz="6900" dirty="0" spc="-1" kern="0">
                 <a:solidFill>
                   <a:srgbClr val="14161C"/>
                 </a:solidFill>
@@ -13375,7 +13331,7 @@
               <a:t>Ngữ</a:t>
             </a:r>
             <a:r>
-              <a:rPr lang="en-US" sz="6600" dirty="0" spc="-1" kern="0">
+              <a:rPr lang="en-US" sz="6900" dirty="0" spc="1" kern="0">
                 <a:solidFill>
                   <a:srgbClr val="14161C"/>
                 </a:solidFill>
@@ -13383,10 +13339,10 @@
                 <a:ea typeface="Bricolage Grotesque ExtraBold" pitchFamily="34" charset="-122"/>
                 <a:cs typeface="Bricolage Grotesque ExtraBold" pitchFamily="34" charset="-120"/>
               </a:rPr>
-              <a:t> cảnh quanh</a:t>
-            </a:r>
-            <a:r>
-              <a:rPr lang="en-US" sz="6600" dirty="0" spc="1" kern="0">
+              <a:t> cảnh quanh dòng</a:t>
+            </a:r>
+            <a:r>
+              <a:rPr lang="en-US" sz="6900" dirty="0" spc="-36" kern="0">
                 <a:solidFill>
                   <a:srgbClr val="14161C"/>
                 </a:solidFill>
@@ -13394,20 +13350,9 @@
                 <a:ea typeface="Bricolage Grotesque ExtraBold" pitchFamily="34" charset="-122"/>
                 <a:cs typeface="Bricolage Grotesque ExtraBold" pitchFamily="34" charset="-120"/>
               </a:rPr>
-              <a:t> dòng</a:t>
-            </a:r>
-            <a:r>
-              <a:rPr lang="en-US" sz="6600" dirty="0" spc="-34" kern="0">
-                <a:solidFill>
-                  <a:srgbClr val="14161C"/>
-                </a:solidFill>
-                <a:latin typeface="Bricolage Grotesque ExtraBold" pitchFamily="34" charset="0"/>
-                <a:ea typeface="Bricolage Grotesque ExtraBold" pitchFamily="34" charset="-122"/>
-                <a:cs typeface="Bricolage Grotesque ExtraBold" pitchFamily="34" charset="-120"/>
-              </a:rPr>
               <a:t> khớp</a:t>
             </a:r>
-            <a:endParaRPr lang="en-US" sz="6600" dirty="0"/>
+            <a:endParaRPr lang="en-US" sz="6900" dirty="0"/>
           </a:p>
         </p:txBody>
       </p:sp>

--- a/system-design-101/vi/lessons/sd-13-022/slides/sd-13-022.pptx
+++ b/system-design-101/vi/lessons/sd-13-022/slides/sd-13-022.pptx
@@ -2162,7 +2162,7 @@
               <a:buNone/>
             </a:pPr>
             <a:r>
-              <a:rPr lang="en-US" sz="2387" b="1" dirty="0" spc="-6" kern="0">
+              <a:rPr lang="en-US" sz="2550" b="1" dirty="0" spc="-6" kern="0">
                 <a:solidFill>
                   <a:srgbClr val="F3EEE3"/>
                 </a:solidFill>
@@ -2173,7 +2173,7 @@
               <a:t>Ngữ</a:t>
             </a:r>
             <a:r>
-              <a:rPr lang="en-US" sz="2387" b="1" dirty="0" spc="-2" kern="0">
+              <a:rPr lang="en-US" sz="2550" b="1" dirty="0" spc="0" kern="0">
                 <a:solidFill>
                   <a:srgbClr val="F3EEE3"/>
                 </a:solidFill>
@@ -2184,7 +2184,7 @@
               <a:t> cảnh</a:t>
             </a:r>
             <a:r>
-              <a:rPr lang="en-US" sz="2387" b="1" dirty="0" spc="1" kern="0">
+              <a:rPr lang="en-US" sz="2550" b="1" dirty="0" spc="2" kern="0">
                 <a:solidFill>
                   <a:srgbClr val="F3EEE3"/>
                 </a:solidFill>
@@ -2195,7 +2195,7 @@
               <a:t> quanh</a:t>
             </a:r>
             <a:r>
-              <a:rPr lang="en-US" sz="2387" b="1" dirty="0" spc="-11" kern="0">
+              <a:rPr lang="en-US" sz="2550" b="1" dirty="0" spc="-7" kern="0">
                 <a:solidFill>
                   <a:srgbClr val="F3EEE3"/>
                 </a:solidFill>
@@ -2206,7 +2206,7 @@
               <a:t> dòng</a:t>
             </a:r>
             <a:r>
-              <a:rPr lang="en-US" sz="2387" b="1" dirty="0" spc="-6" kern="0">
+              <a:rPr lang="en-US" sz="2550" b="1" dirty="0" spc="-3" kern="0">
                 <a:solidFill>
                   <a:srgbClr val="F3EEE3"/>
                 </a:solidFill>
@@ -2216,7 +2216,7 @@
               </a:rPr>
               <a:t> lỗi</a:t>
             </a:r>
-            <a:endParaRPr lang="en-US" sz="2387" dirty="0"/>
+            <a:endParaRPr lang="en-US" sz="2550" dirty="0"/>
           </a:p>
         </p:txBody>
       </p:sp>
@@ -2315,7 +2315,7 @@
               <a:buNone/>
             </a:pPr>
             <a:r>
-              <a:rPr lang="en-US" sz="2400" b="1" dirty="0" spc="-9" kern="0">
+              <a:rPr lang="en-US" sz="2550" b="1" dirty="0" spc="-8" kern="0">
                 <a:solidFill>
                   <a:srgbClr val="F3EEE3"/>
                 </a:solidFill>
@@ -2326,7 +2326,7 @@
               <a:t>Nhật</a:t>
             </a:r>
             <a:r>
-              <a:rPr lang="en-US" sz="2400" b="1" dirty="0" spc="0" kern="0">
+              <a:rPr lang="en-US" sz="2550" b="1" dirty="0" spc="0" kern="0">
                 <a:solidFill>
                   <a:srgbClr val="F3EEE3"/>
                 </a:solidFill>
@@ -2337,7 +2337,7 @@
               <a:t> ký</a:t>
             </a:r>
             <a:r>
-              <a:rPr lang="en-US" sz="2400" b="1" dirty="0" spc="9" kern="0">
+              <a:rPr lang="en-US" sz="2550" b="1" dirty="0" spc="6" kern="0">
                 <a:solidFill>
                   <a:srgbClr val="F3EEE3"/>
                 </a:solidFill>
@@ -2348,7 +2348,7 @@
               <a:t> đã</a:t>
             </a:r>
             <a:r>
-              <a:rPr lang="en-US" sz="2400" b="1" dirty="0" spc="-9" kern="0">
+              <a:rPr lang="en-US" sz="2550" b="1" dirty="0" spc="-8" kern="0">
                 <a:solidFill>
                   <a:srgbClr val="F3EEE3"/>
                 </a:solidFill>
@@ -2358,7 +2358,7 @@
               </a:rPr>
               <a:t> nén</a:t>
             </a:r>
-            <a:endParaRPr lang="en-US" sz="2400" dirty="0"/>
+            <a:endParaRPr lang="en-US" sz="2550" dirty="0"/>
           </a:p>
         </p:txBody>
       </p:sp>
@@ -2457,7 +2457,7 @@
               <a:buNone/>
             </a:pPr>
             <a:r>
-              <a:rPr lang="en-US" sz="2400" b="1" dirty="0" spc="-9" kern="0">
+              <a:rPr lang="en-US" sz="2550" b="1" dirty="0" spc="-8" kern="0">
                 <a:solidFill>
                   <a:srgbClr val="F3EEE3"/>
                 </a:solidFill>
@@ -2468,7 +2468,7 @@
               <a:t>Nhật</a:t>
             </a:r>
             <a:r>
-              <a:rPr lang="en-US" sz="2400" b="1" dirty="0" spc="0" kern="0">
+              <a:rPr lang="en-US" sz="2550" b="1" dirty="0" spc="0" kern="0">
                 <a:solidFill>
                   <a:srgbClr val="F3EEE3"/>
                 </a:solidFill>
@@ -2479,7 +2479,7 @@
               <a:t> ký</a:t>
             </a:r>
             <a:r>
-              <a:rPr lang="en-US" sz="2400" b="1" dirty="0" spc="3" kern="0">
+              <a:rPr lang="en-US" sz="2550" b="1" dirty="0" spc="3" kern="0">
                 <a:solidFill>
                   <a:srgbClr val="F3EEE3"/>
                 </a:solidFill>
@@ -2490,7 +2490,7 @@
               <a:t> đang</a:t>
             </a:r>
             <a:r>
-              <a:rPr lang="en-US" sz="2400" b="1" dirty="0" spc="-3" kern="0">
+              <a:rPr lang="en-US" sz="2550" b="1" dirty="0" spc="2" kern="0">
                 <a:solidFill>
                   <a:srgbClr val="F3EEE3"/>
                 </a:solidFill>
@@ -2500,7 +2500,7 @@
               </a:rPr>
               <a:t> ghi</a:t>
             </a:r>
-            <a:endParaRPr lang="en-US" sz="2400" dirty="0"/>
+            <a:endParaRPr lang="en-US" sz="2550" dirty="0"/>
           </a:p>
         </p:txBody>
       </p:sp>
@@ -2599,7 +2599,7 @@
               <a:buNone/>
             </a:pPr>
             <a:r>
-              <a:rPr lang="en-US" sz="2400" b="1" dirty="0" spc="-9" kern="0">
+              <a:rPr lang="en-US" sz="2550" b="1" dirty="0" spc="-8" kern="0">
                 <a:solidFill>
                   <a:srgbClr val="F3EEE3"/>
                 </a:solidFill>
@@ -2610,7 +2610,7 @@
               <a:t>Nhật</a:t>
             </a:r>
             <a:r>
-              <a:rPr lang="en-US" sz="2400" b="1" dirty="0" spc="0" kern="0">
+              <a:rPr lang="en-US" sz="2550" b="1" dirty="0" spc="0" kern="0">
                 <a:solidFill>
                   <a:srgbClr val="F3EEE3"/>
                 </a:solidFill>
@@ -2621,7 +2621,7 @@
               <a:t> ký</a:t>
             </a:r>
             <a:r>
-              <a:rPr lang="en-US" sz="2400" b="1" dirty="0" spc="6" kern="0">
+              <a:rPr lang="en-US" sz="2550" b="1" dirty="0" spc="5" kern="0">
                 <a:solidFill>
                   <a:srgbClr val="F3EEE3"/>
                 </a:solidFill>
@@ -2631,7 +2631,7 @@
               </a:rPr>
               <a:t> JSON</a:t>
             </a:r>
-            <a:endParaRPr lang="en-US" sz="2400" dirty="0"/>
+            <a:endParaRPr lang="en-US" sz="2550" dirty="0"/>
           </a:p>
         </p:txBody>
       </p:sp>
@@ -2730,7 +2730,7 @@
               <a:buNone/>
             </a:pPr>
             <a:r>
-              <a:rPr lang="en-US" sz="2400" b="1" dirty="0" spc="2" kern="0">
+              <a:rPr lang="en-US" sz="2550" b="1" dirty="0" spc="4" kern="0">
                 <a:solidFill>
                   <a:srgbClr val="F3EEE3"/>
                 </a:solidFill>
@@ -2741,7 +2741,7 @@
               <a:t>Cần</a:t>
             </a:r>
             <a:r>
-              <a:rPr lang="en-US" sz="2400" b="1" dirty="0" spc="-8" kern="0">
+              <a:rPr lang="en-US" sz="2550" b="1" dirty="0" spc="-9" kern="0">
                 <a:solidFill>
                   <a:srgbClr val="F3EEE3"/>
                 </a:solidFill>
@@ -2752,7 +2752,7 @@
               <a:t> một</a:t>
             </a:r>
             <a:r>
-              <a:rPr lang="en-US" sz="2400" b="1" dirty="0" spc="-7" kern="0">
+              <a:rPr lang="en-US" sz="2550" b="1" dirty="0" spc="-6" kern="0">
                 <a:solidFill>
                   <a:srgbClr val="F3EEE3"/>
                 </a:solidFill>
@@ -2763,7 +2763,7 @@
               <a:t> con</a:t>
             </a:r>
             <a:r>
-              <a:rPr lang="en-US" sz="2400" b="1" dirty="0" spc="0" kern="0">
+              <a:rPr lang="en-US" sz="2550" b="1" dirty="0" spc="-5" kern="0">
                 <a:solidFill>
                   <a:srgbClr val="F3EEE3"/>
                 </a:solidFill>
@@ -2773,7 +2773,7 @@
               </a:rPr>
               <a:t> số</a:t>
             </a:r>
-            <a:endParaRPr lang="en-US" sz="2400" dirty="0"/>
+            <a:endParaRPr lang="en-US" sz="2550" dirty="0"/>
           </a:p>
         </p:txBody>
       </p:sp>
@@ -5838,7 +5838,7 @@
               <a:buNone/>
             </a:pPr>
             <a:r>
-              <a:rPr lang="en-US" sz="2400" dirty="0" spc="-2" kern="0">
+              <a:rPr lang="en-US" sz="2550" dirty="0" spc="0" kern="0">
                 <a:solidFill>
                   <a:srgbClr val="E4E1D8"/>
                 </a:solidFill>
@@ -5849,7 +5849,7 @@
               <a:t>-n</a:t>
             </a:r>
             <a:r>
-              <a:rPr lang="en-US" sz="2400" dirty="0" spc="-26" kern="0">
+              <a:rPr lang="en-US" sz="2550" dirty="0" spc="-27" kern="0">
                 <a:solidFill>
                   <a:srgbClr val="E4E1D8"/>
                 </a:solidFill>
@@ -5860,7 +5860,7 @@
               <a:t> kèm</a:t>
             </a:r>
             <a:r>
-              <a:rPr lang="en-US" sz="2400" dirty="0" spc="-9" kern="0">
+              <a:rPr lang="en-US" sz="2550" dirty="0" spc="-11" kern="0">
                 <a:solidFill>
                   <a:srgbClr val="E4E1D8"/>
                 </a:solidFill>
@@ -5871,7 +5871,7 @@
               <a:t> số</a:t>
             </a:r>
             <a:r>
-              <a:rPr lang="en-US" sz="2400" dirty="0" spc="2" kern="0">
+              <a:rPr lang="en-US" sz="2550" dirty="0" spc="0" kern="0">
                 <a:solidFill>
                   <a:srgbClr val="E4E1D8"/>
                 </a:solidFill>
@@ -5879,10 +5879,10 @@
                 <a:ea typeface="Be Vietnam Pro" pitchFamily="34" charset="-122"/>
                 <a:cs typeface="Be Vietnam Pro" pitchFamily="34" charset="-120"/>
               </a:rPr>
-              <a:t> dòng;</a:t>
-            </a:r>
-            <a:r>
-              <a:rPr lang="en-US" sz="2400" dirty="0" spc="0" kern="0">
+              <a:t> dòng; -C</a:t>
+            </a:r>
+            <a:r>
+              <a:rPr lang="en-US" sz="2550" dirty="0" spc="-2" kern="0">
                 <a:solidFill>
                   <a:srgbClr val="E4E1D8"/>
                 </a:solidFill>
@@ -5890,10 +5890,10 @@
                 <a:ea typeface="Be Vietnam Pro" pitchFamily="34" charset="-122"/>
                 <a:cs typeface="Be Vietnam Pro" pitchFamily="34" charset="-120"/>
               </a:rPr>
-              <a:t> -C</a:t>
-            </a:r>
-            <a:r>
-              <a:rPr lang="en-US" sz="2400" dirty="0" spc="-1" kern="0">
+              <a:t> in</a:t>
+            </a:r>
+            <a:r>
+              <a:rPr lang="en-US" sz="2550" dirty="0" spc="2" kern="0">
                 <a:solidFill>
                   <a:srgbClr val="E4E1D8"/>
                 </a:solidFill>
@@ -5901,10 +5901,10 @@
                 <a:ea typeface="Be Vietnam Pro" pitchFamily="34" charset="-122"/>
                 <a:cs typeface="Be Vietnam Pro" pitchFamily="34" charset="-120"/>
               </a:rPr>
-              <a:t> in</a:t>
-            </a:r>
-            <a:r>
-              <a:rPr lang="en-US" sz="2400" dirty="0" spc="2" kern="0">
+              <a:t> thêm</a:t>
+            </a:r>
+            <a:r>
+              <a:rPr lang="en-US" sz="2550" dirty="0" spc="-2" kern="0">
                 <a:solidFill>
                   <a:srgbClr val="E4E1D8"/>
                 </a:solidFill>
@@ -5912,10 +5912,10 @@
                 <a:ea typeface="Be Vietnam Pro" pitchFamily="34" charset="-122"/>
                 <a:cs typeface="Be Vietnam Pro" pitchFamily="34" charset="-120"/>
               </a:rPr>
-              <a:t> thêm</a:t>
-            </a:r>
-            <a:r>
-              <a:rPr lang="en-US" sz="2400" dirty="0" spc="3" kern="0">
+              <a:t> ngữ</a:t>
+            </a:r>
+            <a:r>
+              <a:rPr lang="en-US" sz="2550" dirty="0" spc="1" kern="0">
                 <a:solidFill>
                   <a:srgbClr val="E4E1D8"/>
                 </a:solidFill>
@@ -5923,20 +5923,9 @@
                 <a:ea typeface="Be Vietnam Pro" pitchFamily="34" charset="-122"/>
                 <a:cs typeface="Be Vietnam Pro" pitchFamily="34" charset="-120"/>
               </a:rPr>
-              <a:t> ngữ</a:t>
-            </a:r>
-            <a:r>
-              <a:rPr lang="en-US" sz="2400" dirty="0" spc="0" kern="0">
-                <a:solidFill>
-                  <a:srgbClr val="E4E1D8"/>
-                </a:solidFill>
-                <a:latin typeface="Be Vietnam Pro" pitchFamily="34" charset="0"/>
-                <a:ea typeface="Be Vietnam Pro" pitchFamily="34" charset="-122"/>
-                <a:cs typeface="Be Vietnam Pro" pitchFamily="34" charset="-120"/>
-              </a:rPr>
               <a:t> cảnh.</a:t>
             </a:r>
-            <a:endParaRPr lang="en-US" sz="2400" dirty="0"/>
+            <a:endParaRPr lang="en-US" sz="2550" dirty="0"/>
           </a:p>
         </p:txBody>
       </p:sp>
@@ -6140,7 +6129,7 @@
               <a:buNone/>
             </a:pPr>
             <a:r>
-              <a:rPr lang="en-US" sz="2400" dirty="0" spc="1" kern="0">
+              <a:rPr lang="en-US" sz="2550" dirty="0" spc="0" kern="0">
                 <a:solidFill>
                   <a:srgbClr val="E4E1D8"/>
                 </a:solidFill>
@@ -6151,7 +6140,7 @@
               <a:t>Tìm</a:t>
             </a:r>
             <a:r>
-              <a:rPr lang="en-US" sz="2400" dirty="0" spc="-13" kern="0">
+              <a:rPr lang="en-US" sz="2550" dirty="0" spc="-16" kern="0">
                 <a:solidFill>
                   <a:srgbClr val="E4E1D8"/>
                 </a:solidFill>
@@ -6162,7 +6151,7 @@
               <a:t> trong</a:t>
             </a:r>
             <a:r>
-              <a:rPr lang="en-US" sz="2400" dirty="0" spc="-11" kern="0">
+              <a:rPr lang="en-US" sz="2550" dirty="0" spc="-12" kern="0">
                 <a:solidFill>
                   <a:srgbClr val="E4E1D8"/>
                 </a:solidFill>
@@ -6173,7 +6162,7 @@
               <a:t> tệp</a:t>
             </a:r>
             <a:r>
-              <a:rPr lang="en-US" sz="2400" dirty="0" spc="2" kern="0">
+              <a:rPr lang="en-US" sz="2550" dirty="0" spc="0" kern="0">
                 <a:solidFill>
                   <a:srgbClr val="E4E1D8"/>
                 </a:solidFill>
@@ -6184,7 +6173,7 @@
               <a:t> gzip,</a:t>
             </a:r>
             <a:r>
-              <a:rPr lang="en-US" sz="2400" dirty="0" spc="1" kern="0">
+              <a:rPr lang="en-US" sz="2550" dirty="0" spc="1" kern="0">
                 <a:solidFill>
                   <a:srgbClr val="E4E1D8"/>
                 </a:solidFill>
@@ -6192,10 +6181,10 @@
                 <a:ea typeface="Be Vietnam Pro" pitchFamily="34" charset="-122"/>
                 <a:cs typeface="Be Vietnam Pro" pitchFamily="34" charset="-120"/>
               </a:rPr>
-              <a:t> không giải</a:t>
-            </a:r>
-            <a:r>
-              <a:rPr lang="en-US" sz="2400" dirty="0" spc="0" kern="0">
+              <a:t> không</a:t>
+            </a:r>
+            <a:r>
+              <a:rPr lang="en-US" sz="2550" dirty="0" spc="0" kern="0">
                 <a:solidFill>
                   <a:srgbClr val="E4E1D8"/>
                 </a:solidFill>
@@ -6203,10 +6192,10 @@
                 <a:ea typeface="Be Vietnam Pro" pitchFamily="34" charset="-122"/>
                 <a:cs typeface="Be Vietnam Pro" pitchFamily="34" charset="-120"/>
               </a:rPr>
-              <a:t> nén</a:t>
-            </a:r>
-            <a:r>
-              <a:rPr lang="en-US" sz="2400" dirty="0" spc="-29" kern="0">
+              <a:t> giải nén</a:t>
+            </a:r>
+            <a:r>
+              <a:rPr lang="en-US" sz="2550" dirty="0" spc="-35" kern="0">
                 <a:solidFill>
                   <a:srgbClr val="E4E1D8"/>
                 </a:solidFill>
@@ -6217,7 +6206,7 @@
               <a:t> ra</a:t>
             </a:r>
             <a:r>
-              <a:rPr lang="en-US" sz="2400" dirty="0" spc="20" kern="0">
+              <a:rPr lang="en-US" sz="2550" dirty="0" spc="22" kern="0">
                 <a:solidFill>
                   <a:srgbClr val="E4E1D8"/>
                 </a:solidFill>
@@ -6227,7 +6216,7 @@
               </a:rPr>
               <a:t> đĩa.</a:t>
             </a:r>
-            <a:endParaRPr lang="en-US" sz="2400" dirty="0"/>
+            <a:endParaRPr lang="en-US" sz="2550" dirty="0"/>
           </a:p>
         </p:txBody>
       </p:sp>
@@ -6967,7 +6956,7 @@
               <a:buNone/>
             </a:pPr>
             <a:r>
-              <a:rPr lang="en-US" sz="2400" dirty="0" spc="-3" kern="0">
+              <a:rPr lang="en-US" sz="2550" dirty="0" spc="-4" kern="0">
                 <a:solidFill>
                   <a:srgbClr val="6B6A66"/>
                 </a:solidFill>
@@ -6978,7 +6967,7 @@
               <a:t>Theo</a:t>
             </a:r>
             <a:r>
-              <a:rPr lang="en-US" sz="2400" dirty="0" spc="1" kern="0">
+              <a:rPr lang="en-US" sz="2550" dirty="0" spc="-1" kern="0">
                 <a:solidFill>
                   <a:srgbClr val="6B6A66"/>
                 </a:solidFill>
@@ -6989,7 +6978,7 @@
               <a:t> dõi</a:t>
             </a:r>
             <a:r>
-              <a:rPr lang="en-US" sz="2400" dirty="0" spc="-11" kern="0">
+              <a:rPr lang="en-US" sz="2550" dirty="0" spc="-11" kern="0">
                 <a:solidFill>
                   <a:srgbClr val="6B6A66"/>
                 </a:solidFill>
@@ -7000,7 +6989,7 @@
               <a:t> tệp</a:t>
             </a:r>
             <a:r>
-              <a:rPr lang="en-US" sz="2400" dirty="0" spc="12" kern="0">
+              <a:rPr lang="en-US" sz="2550" dirty="0" spc="10" kern="0">
                 <a:solidFill>
                   <a:srgbClr val="6B6A66"/>
                 </a:solidFill>
@@ -7011,7 +7000,7 @@
               <a:t> đang</a:t>
             </a:r>
             <a:r>
-              <a:rPr lang="en-US" sz="2400" dirty="0" spc="1" kern="0">
+              <a:rPr lang="en-US" sz="2550" dirty="0" spc="0" kern="0">
                 <a:solidFill>
                   <a:srgbClr val="6B6A66"/>
                 </a:solidFill>
@@ -7021,7 +7010,7 @@
               </a:rPr>
               <a:t> ghi</a:t>
             </a:r>
-            <a:endParaRPr lang="en-US" sz="2400" dirty="0"/>
+            <a:endParaRPr lang="en-US" sz="2550" dirty="0"/>
           </a:p>
         </p:txBody>
       </p:sp>
@@ -7159,7 +7148,7 @@
               <a:buNone/>
             </a:pPr>
             <a:r>
-              <a:rPr lang="en-US" sz="2400" dirty="0" spc="-27" kern="0">
+              <a:rPr lang="en-US" sz="2550" dirty="0" spc="-28" kern="0">
                 <a:solidFill>
                   <a:srgbClr val="6B6A66"/>
                 </a:solidFill>
@@ -7170,7 +7159,7 @@
               <a:t>Lọc,</a:t>
             </a:r>
             <a:r>
-              <a:rPr lang="en-US" sz="2400" dirty="0" spc="-21" kern="0">
+              <a:rPr lang="en-US" sz="2550" dirty="0" spc="-25" kern="0">
                 <a:solidFill>
                   <a:srgbClr val="6B6A66"/>
                 </a:solidFill>
@@ -7181,7 +7170,7 @@
               <a:t> xả</a:t>
             </a:r>
             <a:r>
-              <a:rPr lang="en-US" sz="2400" dirty="0" spc="22" kern="0">
+              <a:rPr lang="en-US" sz="2550" dirty="0" spc="20" kern="0">
                 <a:solidFill>
                   <a:srgbClr val="6B6A66"/>
                 </a:solidFill>
@@ -7192,7 +7181,7 @@
               <a:t> từng</a:t>
             </a:r>
             <a:r>
-              <a:rPr lang="en-US" sz="2400" dirty="0" spc="3" kern="0">
+              <a:rPr lang="en-US" sz="2550" dirty="0" spc="0" kern="0">
                 <a:solidFill>
                   <a:srgbClr val="6B6A66"/>
                 </a:solidFill>
@@ -7202,7 +7191,7 @@
               </a:rPr>
               <a:t> dòng</a:t>
             </a:r>
-            <a:endParaRPr lang="en-US" sz="2400" dirty="0"/>
+            <a:endParaRPr lang="en-US" sz="2550" dirty="0"/>
           </a:p>
         </p:txBody>
       </p:sp>
@@ -7329,7 +7318,7 @@
               <a:buNone/>
             </a:pPr>
             <a:r>
-              <a:rPr lang="en-US" sz="2400" dirty="0" spc="0" kern="0">
+              <a:rPr lang="en-US" sz="2550" dirty="0" spc="-2" kern="0">
                 <a:solidFill>
                   <a:srgbClr val="6B6A66"/>
                 </a:solidFill>
@@ -7337,10 +7326,10 @@
                 <a:ea typeface="Be Vietnam Pro" pitchFamily="34" charset="-122"/>
                 <a:cs typeface="Be Vietnam Pro" pitchFamily="34" charset="-120"/>
               </a:rPr>
-              <a:t>Ghi tiếp</a:t>
-            </a:r>
-            <a:r>
-              <a:rPr lang="en-US" sz="2400" dirty="0" spc="-29" kern="0">
+              <a:t>Ghi</a:t>
+            </a:r>
+            <a:r>
+              <a:rPr lang="en-US" sz="2550" dirty="0" spc="1" kern="0">
                 <a:solidFill>
                   <a:srgbClr val="6B6A66"/>
                 </a:solidFill>
@@ -7348,10 +7337,21 @@
                 <a:ea typeface="Be Vietnam Pro" pitchFamily="34" charset="-122"/>
                 <a:cs typeface="Be Vietnam Pro" pitchFamily="34" charset="-120"/>
               </a:rPr>
+              <a:t> tiếp</a:t>
+            </a:r>
+            <a:r>
+              <a:rPr lang="en-US" sz="2550" dirty="0" spc="-35" kern="0">
+                <a:solidFill>
+                  <a:srgbClr val="6B6A66"/>
+                </a:solidFill>
+                <a:latin typeface="Be Vietnam Pro" pitchFamily="34" charset="0"/>
+                <a:ea typeface="Be Vietnam Pro" pitchFamily="34" charset="-122"/>
+                <a:cs typeface="Be Vietnam Pro" pitchFamily="34" charset="-120"/>
+              </a:rPr>
               <a:t> ra</a:t>
             </a:r>
             <a:r>
-              <a:rPr lang="en-US" sz="2400" dirty="0" spc="-10" kern="0">
+              <a:rPr lang="en-US" sz="2550" dirty="0" spc="-11" kern="0">
                 <a:solidFill>
                   <a:srgbClr val="6B6A66"/>
                 </a:solidFill>
@@ -7361,7 +7361,7 @@
               </a:rPr>
               <a:t> tệp</a:t>
             </a:r>
-            <a:endParaRPr lang="en-US" sz="2400" dirty="0"/>
+            <a:endParaRPr lang="en-US" sz="2550" dirty="0"/>
           </a:p>
         </p:txBody>
       </p:sp>
@@ -8497,7 +8497,7 @@
               <a:buNone/>
             </a:pPr>
             <a:r>
-              <a:rPr lang="en-US" sz="2400" b="1" dirty="0" spc="-6" kern="0">
+              <a:rPr lang="en-US" sz="2550" b="1" dirty="0" spc="-2" kern="0">
                 <a:solidFill>
                   <a:srgbClr val="7C93FF"/>
                 </a:solidFill>
@@ -8507,7 +8507,7 @@
               </a:rPr>
               <a:t>Đọc</a:t>
             </a:r>
-            <a:endParaRPr lang="en-US" sz="2400" dirty="0"/>
+            <a:endParaRPr lang="en-US" sz="2550" dirty="0"/>
           </a:p>
         </p:txBody>
       </p:sp>
@@ -8536,7 +8536,7 @@
               <a:buNone/>
             </a:pPr>
             <a:r>
-              <a:rPr lang="en-US" sz="2400" b="1" dirty="0" spc="2" kern="0">
+              <a:rPr lang="en-US" sz="2550" b="1" dirty="0" spc="5" kern="0">
                 <a:solidFill>
                   <a:srgbClr val="F3EEE3"/>
                 </a:solidFill>
@@ -8546,7 +8546,7 @@
               </a:rPr>
               <a:t>{"level":"error","message":"..."}</a:t>
             </a:r>
-            <a:endParaRPr lang="en-US" sz="2400" dirty="0"/>
+            <a:endParaRPr lang="en-US" sz="2550" dirty="0"/>
           </a:p>
         </p:txBody>
       </p:sp>
@@ -8575,7 +8575,7 @@
               <a:buNone/>
             </a:pPr>
             <a:r>
-              <a:rPr lang="en-US" sz="2250" dirty="0" spc="-2" kern="0">
+              <a:rPr lang="en-US" sz="2550" dirty="0" spc="-1" kern="0">
                 <a:solidFill>
                   <a:srgbClr val="E4E1D8"/>
                 </a:solidFill>
@@ -8586,7 +8586,7 @@
               <a:t>Mỗi</a:t>
             </a:r>
             <a:r>
-              <a:rPr lang="en-US" sz="2250" dirty="0" spc="2" kern="0">
+              <a:rPr lang="en-US" sz="2550" dirty="0" spc="0" kern="0">
                 <a:solidFill>
                   <a:srgbClr val="E4E1D8"/>
                 </a:solidFill>
@@ -8597,7 +8597,7 @@
               <a:t> dòng</a:t>
             </a:r>
             <a:r>
-              <a:rPr lang="en-US" sz="2250" dirty="0" spc="-4" kern="0">
+              <a:rPr lang="en-US" sz="2550" dirty="0" spc="-5" kern="0">
                 <a:solidFill>
                   <a:srgbClr val="E4E1D8"/>
                 </a:solidFill>
@@ -8608,7 +8608,7 @@
               <a:t> một</a:t>
             </a:r>
             <a:r>
-              <a:rPr lang="en-US" sz="2250" dirty="0" spc="13" kern="0">
+              <a:rPr lang="en-US" sz="2550" dirty="0" spc="12" kern="0">
                 <a:solidFill>
                   <a:srgbClr val="E4E1D8"/>
                 </a:solidFill>
@@ -8619,7 +8619,7 @@
               <a:t> đối</a:t>
             </a:r>
             <a:r>
-              <a:rPr lang="en-US" sz="2250" dirty="0" spc="6" kern="0">
+              <a:rPr lang="en-US" sz="2550" dirty="0" spc="6" kern="0">
                 <a:solidFill>
                   <a:srgbClr val="E4E1D8"/>
                 </a:solidFill>
@@ -8627,20 +8627,9 @@
                 <a:ea typeface="Be Vietnam Pro" pitchFamily="34" charset="-122"/>
                 <a:cs typeface="Be Vietnam Pro" pitchFamily="34" charset="-120"/>
               </a:rPr>
-              <a:t> tượng</a:t>
-            </a:r>
-            <a:r>
-              <a:rPr lang="en-US" sz="2250" dirty="0" spc="7" kern="0">
-                <a:solidFill>
-                  <a:srgbClr val="E4E1D8"/>
-                </a:solidFill>
-                <a:latin typeface="Be Vietnam Pro" pitchFamily="34" charset="0"/>
-                <a:ea typeface="Be Vietnam Pro" pitchFamily="34" charset="-122"/>
-                <a:cs typeface="Be Vietnam Pro" pitchFamily="34" charset="-120"/>
-              </a:rPr>
-              <a:t> JSON</a:t>
-            </a:r>
-            <a:endParaRPr lang="en-US" sz="2250" dirty="0"/>
+              <a:t> tượng JSON</a:t>
+            </a:r>
+            <a:endParaRPr lang="en-US" sz="2550" dirty="0"/>
           </a:p>
         </p:txBody>
       </p:sp>
@@ -8696,7 +8685,7 @@
               <a:buNone/>
             </a:pPr>
             <a:r>
-              <a:rPr lang="en-US" sz="2400" b="1" dirty="0" spc="-24" kern="0">
+              <a:rPr lang="en-US" sz="2550" b="1" dirty="0" spc="-25" kern="0">
                 <a:solidFill>
                   <a:srgbClr val="F3EEE3"/>
                 </a:solidFill>
@@ -8706,7 +8695,7 @@
               </a:rPr>
               <a:t>Lọc</a:t>
             </a:r>
-            <a:endParaRPr lang="en-US" sz="2400" dirty="0"/>
+            <a:endParaRPr lang="en-US" sz="2550" dirty="0"/>
           </a:p>
         </p:txBody>
       </p:sp>
@@ -8735,7 +8724,7 @@
               <a:buNone/>
             </a:pPr>
             <a:r>
-              <a:rPr lang="en-US" sz="2400" b="1" dirty="0" spc="2" kern="0">
+              <a:rPr lang="en-US" sz="2550" b="1" dirty="0" spc="5" kern="0">
                 <a:solidFill>
                   <a:srgbClr val="F3EEE3"/>
                 </a:solidFill>
@@ -8745,7 +8734,7 @@
               </a:rPr>
               <a:t>select(.level=="error")</a:t>
             </a:r>
-            <a:endParaRPr lang="en-US" sz="2400" dirty="0"/>
+            <a:endParaRPr lang="en-US" sz="2550" dirty="0"/>
           </a:p>
         </p:txBody>
       </p:sp>
@@ -8774,7 +8763,7 @@
               <a:buNone/>
             </a:pPr>
             <a:r>
-              <a:rPr lang="en-US" sz="2250" dirty="0" spc="-1" kern="0">
+              <a:rPr lang="en-US" sz="2550" dirty="0" spc="-4" kern="0">
                 <a:solidFill>
                   <a:srgbClr val="E4E1D8"/>
                 </a:solidFill>
@@ -8785,7 +8774,7 @@
               <a:t>Giữ</a:t>
             </a:r>
             <a:r>
-              <a:rPr lang="en-US" sz="2250" dirty="0" spc="13" kern="0">
+              <a:rPr lang="en-US" sz="2550" dirty="0" spc="13" kern="0">
                 <a:solidFill>
                   <a:srgbClr val="E4E1D8"/>
                 </a:solidFill>
@@ -8796,7 +8785,7 @@
               <a:t> đối</a:t>
             </a:r>
             <a:r>
-              <a:rPr lang="en-US" sz="2250" dirty="0" spc="6" kern="0">
+              <a:rPr lang="en-US" sz="2550" dirty="0" spc="6" kern="0">
                 <a:solidFill>
                   <a:srgbClr val="E4E1D8"/>
                 </a:solidFill>
@@ -8807,7 +8796,7 @@
               <a:t> tượng</a:t>
             </a:r>
             <a:r>
-              <a:rPr lang="en-US" sz="2250" dirty="0" spc="5" kern="0">
+              <a:rPr lang="en-US" sz="2550" dirty="0" spc="-1" kern="0">
                 <a:solidFill>
                   <a:srgbClr val="E4E1D8"/>
                 </a:solidFill>
@@ -8818,7 +8807,7 @@
               <a:t> có</a:t>
             </a:r>
             <a:r>
-              <a:rPr lang="en-US" sz="2250" dirty="0" spc="-16" kern="0">
+              <a:rPr lang="en-US" sz="2550" dirty="0" spc="-17" kern="0">
                 <a:solidFill>
                   <a:srgbClr val="E4E1D8"/>
                 </a:solidFill>
@@ -8829,7 +8818,7 @@
               <a:t> level</a:t>
             </a:r>
             <a:r>
-              <a:rPr lang="en-US" sz="2250" dirty="0" spc="-1" kern="0">
+              <a:rPr lang="en-US" sz="2550" dirty="0" spc="0" kern="0">
                 <a:solidFill>
                   <a:srgbClr val="E4E1D8"/>
                 </a:solidFill>
@@ -8840,7 +8829,7 @@
               <a:t> là</a:t>
             </a:r>
             <a:r>
-              <a:rPr lang="en-US" sz="2250" dirty="0" spc="-18" kern="0">
+              <a:rPr lang="en-US" sz="2550" dirty="0" spc="-17" kern="0">
                 <a:solidFill>
                   <a:srgbClr val="E4E1D8"/>
                 </a:solidFill>
@@ -8850,7 +8839,7 @@
               </a:rPr>
               <a:t> error</a:t>
             </a:r>
-            <a:endParaRPr lang="en-US" sz="2250" dirty="0"/>
+            <a:endParaRPr lang="en-US" sz="2550" dirty="0"/>
           </a:p>
         </p:txBody>
       </p:sp>
@@ -8906,7 +8895,7 @@
               <a:buNone/>
             </a:pPr>
             <a:r>
-              <a:rPr lang="en-US" sz="2400" b="1" dirty="0" spc="-8" kern="0">
+              <a:rPr lang="en-US" sz="2550" b="1" dirty="0" spc="-6" kern="0">
                 <a:solidFill>
                   <a:srgbClr val="7C93FF"/>
                 </a:solidFill>
@@ -8917,7 +8906,7 @@
               <a:t>Chọn</a:t>
             </a:r>
             <a:r>
-              <a:rPr lang="en-US" sz="2400" b="1" dirty="0" spc="5" kern="0">
+              <a:rPr lang="en-US" sz="2550" b="1" dirty="0" spc="6" kern="0">
                 <a:solidFill>
                   <a:srgbClr val="7C93FF"/>
                 </a:solidFill>
@@ -8927,7 +8916,7 @@
               </a:rPr>
               <a:t> trường</a:t>
             </a:r>
-            <a:endParaRPr lang="en-US" sz="2400" dirty="0"/>
+            <a:endParaRPr lang="en-US" sz="2550" dirty="0"/>
           </a:p>
         </p:txBody>
       </p:sp>
@@ -8956,7 +8945,7 @@
               <a:buNone/>
             </a:pPr>
             <a:r>
-              <a:rPr lang="en-US" sz="2400" b="1" dirty="0" spc="3" kern="0">
+              <a:rPr lang="en-US" sz="2550" b="1" dirty="0" spc="5" kern="0">
                 <a:solidFill>
                   <a:srgbClr val="F3EEE3"/>
                 </a:solidFill>
@@ -8966,7 +8955,7 @@
               </a:rPr>
               <a:t>.message</a:t>
             </a:r>
-            <a:endParaRPr lang="en-US" sz="2400" dirty="0"/>
+            <a:endParaRPr lang="en-US" sz="2550" dirty="0"/>
           </a:p>
         </p:txBody>
       </p:sp>
@@ -8995,7 +8984,7 @@
               <a:buNone/>
             </a:pPr>
             <a:r>
-              <a:rPr lang="en-US" sz="2250" dirty="0" spc="4" kern="0">
+              <a:rPr lang="en-US" sz="2550" dirty="0" spc="-3" kern="0">
                 <a:solidFill>
                   <a:srgbClr val="E4E1D8"/>
                 </a:solidFill>
@@ -9006,7 +8995,7 @@
               <a:t>In</a:t>
             </a:r>
             <a:r>
-              <a:rPr lang="en-US" sz="2250" dirty="0" spc="-32" kern="0">
+              <a:rPr lang="en-US" sz="2550" dirty="0" spc="-35" kern="0">
                 <a:solidFill>
                   <a:srgbClr val="E4E1D8"/>
                 </a:solidFill>
@@ -9017,7 +9006,7 @@
               <a:t> ra</a:t>
             </a:r>
             <a:r>
-              <a:rPr lang="en-US" sz="2250" dirty="0" spc="5" kern="0">
+              <a:rPr lang="en-US" sz="2550" dirty="0" spc="5" kern="0">
                 <a:solidFill>
                   <a:srgbClr val="E4E1D8"/>
                 </a:solidFill>
@@ -9028,7 +9017,7 @@
               <a:t> trường</a:t>
             </a:r>
             <a:r>
-              <a:rPr lang="en-US" sz="2250" dirty="0" spc="-9" kern="0">
+              <a:rPr lang="en-US" sz="2550" dirty="0" spc="-10" kern="0">
                 <a:solidFill>
                   <a:srgbClr val="E4E1D8"/>
                 </a:solidFill>
@@ -9038,7 +9027,7 @@
               </a:rPr>
               <a:t> message</a:t>
             </a:r>
-            <a:endParaRPr lang="en-US" sz="2250" dirty="0"/>
+            <a:endParaRPr lang="en-US" sz="2550" dirty="0"/>
           </a:p>
         </p:txBody>
       </p:sp>
@@ -13735,17 +13724,17 @@
           <a:ln/>
         </p:spPr>
         <p:txBody>
-          <a:bodyPr wrap="square" lIns="0" tIns="12144" rIns="0" bIns="-12144" rtlCol="0" anchor="t"/>
+          <a:bodyPr wrap="square" lIns="0" tIns="13764" rIns="0" bIns="-13764" rtlCol="0" anchor="t"/>
           <a:lstStyle/>
           <a:p>
             <a:pPr algn="l" indent="0" marL="0">
               <a:lnSpc>
-                <a:spcPts val="2925"/>
+                <a:spcPts val="3315"/>
               </a:lnSpc>
               <a:buNone/>
             </a:pPr>
             <a:r>
-              <a:rPr lang="en-US" sz="2250" dirty="0" spc="0" kern="0">
+              <a:rPr lang="en-US" sz="2550" dirty="0" spc="1" kern="0">
                 <a:solidFill>
                   <a:srgbClr val="14161C"/>
                 </a:solidFill>
@@ -13756,7 +13745,7 @@
               <a:t>chỉ</a:t>
             </a:r>
             <a:r>
-              <a:rPr lang="en-US" sz="2250" dirty="0" spc="2" kern="0">
+              <a:rPr lang="en-US" sz="2550" dirty="0" spc="0" kern="0">
                 <a:solidFill>
                   <a:srgbClr val="14161C"/>
                 </a:solidFill>
@@ -13767,7 +13756,7 @@
               <a:t> dòng</a:t>
             </a:r>
             <a:r>
-              <a:rPr lang="en-US" sz="2250" dirty="0" spc="7" kern="0">
+              <a:rPr lang="en-US" sz="2550" dirty="0" spc="6" kern="0">
                 <a:solidFill>
                   <a:srgbClr val="14161C"/>
                 </a:solidFill>
@@ -13777,7 +13766,7 @@
               </a:rPr>
               <a:t> trước</a:t>
             </a:r>
-            <a:endParaRPr lang="en-US" sz="2250" dirty="0"/>
+            <a:endParaRPr lang="en-US" sz="2550" dirty="0"/>
           </a:p>
         </p:txBody>
       </p:sp>
@@ -13890,17 +13879,17 @@
           <a:ln/>
         </p:spPr>
         <p:txBody>
-          <a:bodyPr wrap="square" lIns="0" tIns="12144" rIns="0" bIns="-12144" rtlCol="0" anchor="t"/>
+          <a:bodyPr wrap="square" lIns="0" tIns="13764" rIns="0" bIns="-13764" rtlCol="0" anchor="t"/>
           <a:lstStyle/>
           <a:p>
             <a:pPr algn="l" indent="0" marL="0">
               <a:lnSpc>
-                <a:spcPts val="2925"/>
+                <a:spcPts val="3315"/>
               </a:lnSpc>
               <a:buNone/>
             </a:pPr>
             <a:r>
-              <a:rPr lang="en-US" sz="2250" dirty="0" spc="0" kern="0">
+              <a:rPr lang="en-US" sz="2550" dirty="0" spc="1" kern="0">
                 <a:solidFill>
                   <a:srgbClr val="14161C"/>
                 </a:solidFill>
@@ -13911,7 +13900,7 @@
               <a:t>chỉ</a:t>
             </a:r>
             <a:r>
-              <a:rPr lang="en-US" sz="2250" dirty="0" spc="2" kern="0">
+              <a:rPr lang="en-US" sz="2550" dirty="0" spc="0" kern="0">
                 <a:solidFill>
                   <a:srgbClr val="14161C"/>
                 </a:solidFill>
@@ -13922,7 +13911,7 @@
               <a:t> dòng</a:t>
             </a:r>
             <a:r>
-              <a:rPr lang="en-US" sz="2250" dirty="0" spc="-4" kern="0">
+              <a:rPr lang="en-US" sz="2550" dirty="0" spc="-6" kern="0">
                 <a:solidFill>
                   <a:srgbClr val="14161C"/>
                 </a:solidFill>
@@ -13932,7 +13921,7 @@
               </a:rPr>
               <a:t> sau</a:t>
             </a:r>
-            <a:endParaRPr lang="en-US" sz="2250" dirty="0"/>
+            <a:endParaRPr lang="en-US" sz="2550" dirty="0"/>
           </a:p>
         </p:txBody>
       </p:sp>
@@ -14111,7 +14100,7 @@
         <p:spPr>
           <a:xfrm>
             <a:off x="13087350" y="5381625"/>
-            <a:ext cx="4000500" cy="762000"/>
+            <a:ext cx="4000500" cy="876300"/>
           </a:xfrm>
           <a:prstGeom prst="rect">
             <a:avLst/>
@@ -14120,17 +14109,17 @@
           <a:ln/>
         </p:spPr>
         <p:txBody>
-          <a:bodyPr wrap="square" lIns="0" tIns="12144" rIns="0" bIns="-12144" rtlCol="0" anchor="t"/>
+          <a:bodyPr wrap="square" lIns="0" tIns="13764" rIns="0" bIns="-13764" rtlCol="0" anchor="t"/>
           <a:lstStyle/>
           <a:p>
             <a:pPr algn="l" indent="0" marL="0">
               <a:lnSpc>
-                <a:spcPts val="2925"/>
+                <a:spcPts val="3315"/>
               </a:lnSpc>
               <a:buNone/>
             </a:pPr>
             <a:r>
-              <a:rPr lang="en-US" sz="2250" dirty="0" spc="-1" kern="0">
+              <a:rPr lang="en-US" sz="2550" dirty="0" spc="2" kern="0">
                 <a:solidFill>
                   <a:srgbClr val="14161C"/>
                 </a:solidFill>
@@ -14141,7 +14130,7 @@
               <a:t>cả</a:t>
             </a:r>
             <a:r>
-              <a:rPr lang="en-US" sz="2250" dirty="0" spc="6" kern="0">
+              <a:rPr lang="en-US" sz="2550" dirty="0" spc="6" kern="0">
                 <a:solidFill>
                   <a:srgbClr val="14161C"/>
                 </a:solidFill>
@@ -14152,7 +14141,7 @@
               <a:t> trước</a:t>
             </a:r>
             <a:r>
-              <a:rPr lang="en-US" sz="2250" dirty="0" spc="-16" kern="0">
+              <a:rPr lang="en-US" sz="2550" dirty="0" spc="-19" kern="0">
                 <a:solidFill>
                   <a:srgbClr val="14161C"/>
                 </a:solidFill>
@@ -14163,7 +14152,7 @@
               <a:t> và</a:t>
             </a:r>
             <a:r>
-              <a:rPr lang="en-US" sz="2250" dirty="0" spc="-4" kern="0">
+              <a:rPr lang="en-US" sz="2550" dirty="0" spc="-6" kern="0">
                 <a:solidFill>
                   <a:srgbClr val="14161C"/>
                 </a:solidFill>
@@ -14174,7 +14163,7 @@
               <a:t> sau</a:t>
             </a:r>
             <a:r>
-              <a:rPr lang="en-US" sz="2250" dirty="0" spc="2" kern="0">
+              <a:rPr lang="en-US" sz="2550" dirty="0" spc="0" kern="0">
                 <a:solidFill>
                   <a:srgbClr val="14161C"/>
                 </a:solidFill>
@@ -14182,20 +14171,9 @@
                 <a:ea typeface="Be Vietnam Pro" pitchFamily="34" charset="-122"/>
                 <a:cs typeface="Be Vietnam Pro" pitchFamily="34" charset="-120"/>
               </a:rPr>
-              <a:t> dòng</a:t>
-            </a:r>
-            <a:r>
-              <a:rPr lang="en-US" sz="2250" dirty="0" spc="3" kern="0">
-                <a:solidFill>
-                  <a:srgbClr val="14161C"/>
-                </a:solidFill>
-                <a:latin typeface="Be Vietnam Pro" pitchFamily="34" charset="0"/>
-                <a:ea typeface="Be Vietnam Pro" pitchFamily="34" charset="-122"/>
-                <a:cs typeface="Be Vietnam Pro" pitchFamily="34" charset="-120"/>
-              </a:rPr>
-              <a:t> khớp</a:t>
-            </a:r>
-            <a:endParaRPr lang="en-US" sz="2250" dirty="0"/>
+              <a:t> dòng khớp</a:t>
+            </a:r>
+            <a:endParaRPr lang="en-US" sz="2550" dirty="0"/>
           </a:p>
         </p:txBody>
       </p:sp>

--- a/system-design-101/vi/lessons/sd-13-022/slides/sd-13-022.pptx
+++ b/system-design-101/vi/lessons/sd-13-022/slides/sd-13-022.pptx
@@ -7621,7 +7621,7 @@
                 <a:ea typeface="Be Vietnam Pro" pitchFamily="34" charset="-122"/>
                 <a:cs typeface="Be Vietnam Pro" pitchFamily="34" charset="-120"/>
               </a:rPr>
-              <a:t> có cờ:</a:t>
+              <a:t> cờ:</a:t>
             </a:r>
             <a:r>
               <a:rPr lang="en-US" sz="2700" dirty="0" spc="-23" kern="0">
@@ -7635,7 +7635,7 @@
               <a:t> grep</a:t>
             </a:r>
             <a:r>
-              <a:rPr lang="en-US" sz="2700" dirty="0" spc="11" kern="0">
+              <a:rPr lang="en-US" sz="2700" dirty="0" spc="10" kern="0">
                 <a:solidFill>
                   <a:srgbClr val="14161C"/>
                 </a:solidFill>
@@ -7690,7 +7690,7 @@
               <a:t> tới</a:t>
             </a:r>
             <a:r>
-              <a:rPr lang="en-US" sz="2700" dirty="0" spc="-1" kern="0">
+              <a:rPr lang="en-US" sz="2700" dirty="0" spc="0" kern="0">
                 <a:solidFill>
                   <a:srgbClr val="14161C"/>
                 </a:solidFill>

--- a/system-design-101/vi/lessons/sd-13-022/slides/sd-13-022.pptx
+++ b/system-design-101/vi/lessons/sd-13-022/slides/sd-13-022.pptx
@@ -32,12 +32,8 @@
       <p:regular r:id="rId18"/>
     </p:embeddedFont>
     <p:embeddedFont>
-      <p:font typeface="JetBrains Mono"/>
-      <p:bold r:id="rId20"/>
-    </p:embeddedFont>
-    <p:embeddedFont>
-      <p:font typeface="JetBrains Mono ExtraBold"/>
-      <p:regular r:id="rId21"/>
+      <p:font typeface="Be Vietnam Pro ExtraBold"/>
+      <p:regular r:id="rId20"/>
     </p:embeddedFont>
   </p:embeddedFontLst>
   <p:defaultTextStyle>
@@ -2249,17 +2245,28 @@
               <a:buNone/>
             </a:pPr>
             <a:r>
-              <a:rPr lang="en-US" sz="2250" b="1" dirty="0" kern="0">
+              <a:rPr lang="en-US" sz="2550" b="1" dirty="0" spc="-17" kern="0">
                 <a:solidFill>
                   <a:srgbClr val="14161C"/>
                 </a:solidFill>
-                <a:latin typeface="JetBrains Mono" pitchFamily="34" charset="0"/>
-                <a:ea typeface="JetBrains Mono" pitchFamily="34" charset="-122"/>
-                <a:cs typeface="JetBrains Mono" pitchFamily="34" charset="-120"/>
-              </a:rPr>
-              <a:t>grep -C</a:t>
-            </a:r>
-            <a:endParaRPr lang="en-US" sz="2250" dirty="0"/>
+                <a:latin typeface="Be Vietnam Pro" pitchFamily="34" charset="0"/>
+                <a:ea typeface="Be Vietnam Pro" pitchFamily="34" charset="-122"/>
+                <a:cs typeface="Be Vietnam Pro" pitchFamily="34" charset="-120"/>
+              </a:rPr>
+              <a:t>grep</a:t>
+            </a:r>
+            <a:r>
+              <a:rPr lang="en-US" sz="2550" b="1" dirty="0" spc="0" kern="0">
+                <a:solidFill>
+                  <a:srgbClr val="14161C"/>
+                </a:solidFill>
+                <a:latin typeface="Be Vietnam Pro" pitchFamily="34" charset="0"/>
+                <a:ea typeface="Be Vietnam Pro" pitchFamily="34" charset="-122"/>
+                <a:cs typeface="Be Vietnam Pro" pitchFamily="34" charset="-120"/>
+              </a:rPr>
+              <a:t> -C</a:t>
+            </a:r>
+            <a:endParaRPr lang="en-US" sz="2550" dirty="0"/>
           </a:p>
         </p:txBody>
       </p:sp>
@@ -2391,17 +2398,17 @@
               <a:buNone/>
             </a:pPr>
             <a:r>
-              <a:rPr lang="en-US" sz="2250" b="1" dirty="0" kern="0">
+              <a:rPr lang="en-US" sz="2550" b="1" dirty="0" spc="-15" kern="0">
                 <a:solidFill>
                   <a:srgbClr val="14161C"/>
                 </a:solidFill>
-                <a:latin typeface="JetBrains Mono" pitchFamily="34" charset="0"/>
-                <a:ea typeface="JetBrains Mono" pitchFamily="34" charset="-122"/>
-                <a:cs typeface="JetBrains Mono" pitchFamily="34" charset="-120"/>
+                <a:latin typeface="Be Vietnam Pro" pitchFamily="34" charset="0"/>
+                <a:ea typeface="Be Vietnam Pro" pitchFamily="34" charset="-122"/>
+                <a:cs typeface="Be Vietnam Pro" pitchFamily="34" charset="-120"/>
               </a:rPr>
               <a:t>zgrep</a:t>
             </a:r>
-            <a:endParaRPr lang="en-US" sz="2250" dirty="0"/>
+            <a:endParaRPr lang="en-US" sz="2550" dirty="0"/>
           </a:p>
         </p:txBody>
       </p:sp>
@@ -2533,17 +2540,50 @@
               <a:buNone/>
             </a:pPr>
             <a:r>
-              <a:rPr lang="en-US" sz="2250" b="1" dirty="0" kern="0">
+              <a:rPr lang="en-US" sz="2550" b="1" dirty="0" spc="-1" kern="0">
                 <a:solidFill>
                   <a:srgbClr val="14161C"/>
                 </a:solidFill>
-                <a:latin typeface="JetBrains Mono" pitchFamily="34" charset="0"/>
-                <a:ea typeface="JetBrains Mono" pitchFamily="34" charset="-122"/>
-                <a:cs typeface="JetBrains Mono" pitchFamily="34" charset="-120"/>
-              </a:rPr>
-              <a:t>tail -f | grep</a:t>
-            </a:r>
-            <a:endParaRPr lang="en-US" sz="2250" dirty="0"/>
+                <a:latin typeface="Be Vietnam Pro" pitchFamily="34" charset="0"/>
+                <a:ea typeface="Be Vietnam Pro" pitchFamily="34" charset="-122"/>
+                <a:cs typeface="Be Vietnam Pro" pitchFamily="34" charset="-120"/>
+              </a:rPr>
+              <a:t>tail</a:t>
+            </a:r>
+            <a:r>
+              <a:rPr lang="en-US" sz="2550" b="1" dirty="0" spc="1" kern="0">
+                <a:solidFill>
+                  <a:srgbClr val="14161C"/>
+                </a:solidFill>
+                <a:latin typeface="Be Vietnam Pro" pitchFamily="34" charset="0"/>
+                <a:ea typeface="Be Vietnam Pro" pitchFamily="34" charset="-122"/>
+                <a:cs typeface="Be Vietnam Pro" pitchFamily="34" charset="-120"/>
+              </a:rPr>
+              <a:t> -f</a:t>
+            </a:r>
+            <a:r>
+              <a:rPr lang="en-US" sz="2550" b="1" dirty="0" spc="-4" kern="0">
+                <a:solidFill>
+                  <a:srgbClr val="14161C"/>
+                </a:solidFill>
+                <a:latin typeface="Be Vietnam Pro" pitchFamily="34" charset="0"/>
+                <a:ea typeface="Be Vietnam Pro" pitchFamily="34" charset="-122"/>
+                <a:cs typeface="Be Vietnam Pro" pitchFamily="34" charset="-120"/>
+              </a:rPr>
+              <a:t> |</a:t>
+            </a:r>
+            <a:r>
+              <a:rPr lang="en-US" sz="2550" b="1" dirty="0" spc="-14" kern="0">
+                <a:solidFill>
+                  <a:srgbClr val="14161C"/>
+                </a:solidFill>
+                <a:latin typeface="Be Vietnam Pro" pitchFamily="34" charset="0"/>
+                <a:ea typeface="Be Vietnam Pro" pitchFamily="34" charset="-122"/>
+                <a:cs typeface="Be Vietnam Pro" pitchFamily="34" charset="-120"/>
+              </a:rPr>
+              <a:t> grep</a:t>
+            </a:r>
+            <a:endParaRPr lang="en-US" sz="2550" dirty="0"/>
           </a:p>
         </p:txBody>
       </p:sp>
@@ -2664,17 +2704,17 @@
               <a:buNone/>
             </a:pPr>
             <a:r>
-              <a:rPr lang="en-US" sz="2250" b="1" dirty="0" kern="0">
+              <a:rPr lang="en-US" sz="2550" b="1" dirty="0" spc="-6" kern="0">
                 <a:solidFill>
                   <a:srgbClr val="14161C"/>
                 </a:solidFill>
-                <a:latin typeface="JetBrains Mono" pitchFamily="34" charset="0"/>
-                <a:ea typeface="JetBrains Mono" pitchFamily="34" charset="-122"/>
-                <a:cs typeface="JetBrains Mono" pitchFamily="34" charset="-120"/>
+                <a:latin typeface="Be Vietnam Pro" pitchFamily="34" charset="0"/>
+                <a:ea typeface="Be Vietnam Pro" pitchFamily="34" charset="-122"/>
+                <a:cs typeface="Be Vietnam Pro" pitchFamily="34" charset="-120"/>
               </a:rPr>
               <a:t>jq</a:t>
             </a:r>
-            <a:endParaRPr lang="en-US" sz="2250" dirty="0"/>
+            <a:endParaRPr lang="en-US" sz="2550" dirty="0"/>
           </a:p>
         </p:txBody>
       </p:sp>
@@ -2806,17 +2846,17 @@
               <a:buNone/>
             </a:pPr>
             <a:r>
-              <a:rPr lang="en-US" sz="2250" b="1" dirty="0" kern="0">
+              <a:rPr lang="en-US" sz="2550" b="1" dirty="0" spc="-14" kern="0">
                 <a:solidFill>
                   <a:srgbClr val="14161C"/>
                 </a:solidFill>
-                <a:latin typeface="JetBrains Mono" pitchFamily="34" charset="0"/>
-                <a:ea typeface="JetBrains Mono" pitchFamily="34" charset="-122"/>
-                <a:cs typeface="JetBrains Mono" pitchFamily="34" charset="-120"/>
+                <a:latin typeface="Be Vietnam Pro" pitchFamily="34" charset="0"/>
+                <a:ea typeface="Be Vietnam Pro" pitchFamily="34" charset="-122"/>
+                <a:cs typeface="Be Vietnam Pro" pitchFamily="34" charset="-120"/>
               </a:rPr>
               <a:t>awk</a:t>
             </a:r>
-            <a:endParaRPr lang="en-US" sz="2250" dirty="0"/>
+            <a:endParaRPr lang="en-US" sz="2550" dirty="0"/>
           </a:p>
         </p:txBody>
       </p:sp>
@@ -5799,15 +5839,59 @@
               <a:buNone/>
             </a:pPr>
             <a:r>
-              <a:rPr lang="en-US" sz="2700" b="1" dirty="0" spc="-5" kern="0">
+              <a:rPr lang="en-US" sz="2700" b="1" dirty="0" spc="-16" kern="0">
                 <a:solidFill>
                   <a:srgbClr val="F3EEE3"/>
                 </a:solidFill>
-                <a:latin typeface="JetBrains Mono" pitchFamily="34" charset="0"/>
-                <a:ea typeface="JetBrains Mono" pitchFamily="34" charset="-122"/>
-                <a:cs typeface="JetBrains Mono" pitchFamily="34" charset="-120"/>
-              </a:rPr>
-              <a:t>grep -n -C 3 "timeout" app.log</a:t>
+                <a:latin typeface="Be Vietnam Pro" pitchFamily="34" charset="0"/>
+                <a:ea typeface="Be Vietnam Pro" pitchFamily="34" charset="-122"/>
+                <a:cs typeface="Be Vietnam Pro" pitchFamily="34" charset="-120"/>
+              </a:rPr>
+              <a:t>grep</a:t>
+            </a:r>
+            <a:r>
+              <a:rPr lang="en-US" sz="2700" b="1" dirty="0" spc="-1" kern="0">
+                <a:solidFill>
+                  <a:srgbClr val="F3EEE3"/>
+                </a:solidFill>
+                <a:latin typeface="Be Vietnam Pro" pitchFamily="34" charset="0"/>
+                <a:ea typeface="Be Vietnam Pro" pitchFamily="34" charset="-122"/>
+                <a:cs typeface="Be Vietnam Pro" pitchFamily="34" charset="-120"/>
+              </a:rPr>
+              <a:t> -n</a:t>
+            </a:r>
+            <a:r>
+              <a:rPr lang="en-US" sz="2700" b="1" dirty="0" spc="1" kern="0">
+                <a:solidFill>
+                  <a:srgbClr val="F3EEE3"/>
+                </a:solidFill>
+                <a:latin typeface="Be Vietnam Pro" pitchFamily="34" charset="0"/>
+                <a:ea typeface="Be Vietnam Pro" pitchFamily="34" charset="-122"/>
+                <a:cs typeface="Be Vietnam Pro" pitchFamily="34" charset="-120"/>
+              </a:rPr>
+              <a:t> -C</a:t>
+            </a:r>
+            <a:r>
+              <a:rPr lang="en-US" sz="2700" b="1" dirty="0" spc="-2" kern="0">
+                <a:solidFill>
+                  <a:srgbClr val="F3EEE3"/>
+                </a:solidFill>
+                <a:latin typeface="Be Vietnam Pro" pitchFamily="34" charset="0"/>
+                <a:ea typeface="Be Vietnam Pro" pitchFamily="34" charset="-122"/>
+                <a:cs typeface="Be Vietnam Pro" pitchFamily="34" charset="-120"/>
+              </a:rPr>
+              <a:t> 3</a:t>
+            </a:r>
+            <a:r>
+              <a:rPr lang="en-US" sz="2700" b="1" dirty="0" spc="-3" kern="0">
+                <a:solidFill>
+                  <a:srgbClr val="F3EEE3"/>
+                </a:solidFill>
+                <a:latin typeface="Be Vietnam Pro" pitchFamily="34" charset="0"/>
+                <a:ea typeface="Be Vietnam Pro" pitchFamily="34" charset="-122"/>
+                <a:cs typeface="Be Vietnam Pro" pitchFamily="34" charset="-120"/>
+              </a:rPr>
+              <a:t> "timeout" app.log</a:t>
             </a:r>
             <a:endParaRPr lang="en-US" sz="2700" dirty="0"/>
           </a:p>
@@ -6090,15 +6174,37 @@
               <a:buNone/>
             </a:pPr>
             <a:r>
-              <a:rPr lang="en-US" sz="2700" b="1" dirty="0" spc="-5" kern="0">
+              <a:rPr lang="en-US" sz="2700" b="1" dirty="0" spc="-16" kern="0">
                 <a:solidFill>
                   <a:srgbClr val="F3EEE3"/>
                 </a:solidFill>
-                <a:latin typeface="JetBrains Mono" pitchFamily="34" charset="0"/>
-                <a:ea typeface="JetBrains Mono" pitchFamily="34" charset="-122"/>
-                <a:cs typeface="JetBrains Mono" pitchFamily="34" charset="-120"/>
-              </a:rPr>
-              <a:t>zgrep "ERROR" app.log.*.gz</a:t>
+                <a:latin typeface="Be Vietnam Pro" pitchFamily="34" charset="0"/>
+                <a:ea typeface="Be Vietnam Pro" pitchFamily="34" charset="-122"/>
+                <a:cs typeface="Be Vietnam Pro" pitchFamily="34" charset="-120"/>
+              </a:rPr>
+              <a:t>zgrep</a:t>
+            </a:r>
+            <a:r>
+              <a:rPr lang="en-US" sz="2700" b="1" dirty="0" spc="-12" kern="0">
+                <a:solidFill>
+                  <a:srgbClr val="F3EEE3"/>
+                </a:solidFill>
+                <a:latin typeface="Be Vietnam Pro" pitchFamily="34" charset="0"/>
+                <a:ea typeface="Be Vietnam Pro" pitchFamily="34" charset="-122"/>
+                <a:cs typeface="Be Vietnam Pro" pitchFamily="34" charset="-120"/>
+              </a:rPr>
+              <a:t> "ERROR"</a:t>
+            </a:r>
+            <a:r>
+              <a:rPr lang="en-US" sz="2700" b="1" dirty="0" spc="-1" kern="0">
+                <a:solidFill>
+                  <a:srgbClr val="F3EEE3"/>
+                </a:solidFill>
+                <a:latin typeface="Be Vietnam Pro" pitchFamily="34" charset="0"/>
+                <a:ea typeface="Be Vietnam Pro" pitchFamily="34" charset="-122"/>
+                <a:cs typeface="Be Vietnam Pro" pitchFamily="34" charset="-120"/>
+              </a:rPr>
+              <a:t> app.log.*.gz</a:t>
             </a:r>
             <a:endParaRPr lang="en-US" sz="2700" dirty="0"/>
           </a:p>
@@ -6906,28 +7012,39 @@
               <a:buNone/>
             </a:pPr>
             <a:r>
-              <a:rPr lang="en-US" sz="2400" b="1" dirty="0" spc="3" kern="0">
+              <a:rPr lang="en-US" sz="2550" b="1" dirty="0" spc="-1" kern="0">
                 <a:solidFill>
                   <a:srgbClr val="14161C"/>
                 </a:solidFill>
-                <a:latin typeface="JetBrains Mono" pitchFamily="34" charset="0"/>
-                <a:ea typeface="JetBrains Mono" pitchFamily="34" charset="-122"/>
-                <a:cs typeface="JetBrains Mono" pitchFamily="34" charset="-120"/>
+                <a:latin typeface="Be Vietnam Pro" pitchFamily="34" charset="0"/>
+                <a:ea typeface="Be Vietnam Pro" pitchFamily="34" charset="-122"/>
+                <a:cs typeface="Be Vietnam Pro" pitchFamily="34" charset="-120"/>
               </a:rPr>
               <a:t>tail</a:t>
             </a:r>
             <a:r>
-              <a:rPr lang="en-US" sz="2400" b="1" dirty="0" spc="2" kern="0">
+              <a:rPr lang="en-US" sz="2550" b="1" dirty="0" spc="1" kern="0">
                 <a:solidFill>
                   <a:srgbClr val="14161C"/>
                 </a:solidFill>
-                <a:latin typeface="JetBrains Mono" pitchFamily="34" charset="0"/>
-                <a:ea typeface="JetBrains Mono" pitchFamily="34" charset="-122"/>
-                <a:cs typeface="JetBrains Mono" pitchFamily="34" charset="-120"/>
-              </a:rPr>
-              <a:t> -f app.log</a:t>
-            </a:r>
-            <a:endParaRPr lang="en-US" sz="2400" dirty="0"/>
+                <a:latin typeface="Be Vietnam Pro" pitchFamily="34" charset="0"/>
+                <a:ea typeface="Be Vietnam Pro" pitchFamily="34" charset="-122"/>
+                <a:cs typeface="Be Vietnam Pro" pitchFamily="34" charset="-120"/>
+              </a:rPr>
+              <a:t> -f</a:t>
+            </a:r>
+            <a:r>
+              <a:rPr lang="en-US" sz="2550" b="1" dirty="0" spc="-2" kern="0">
+                <a:solidFill>
+                  <a:srgbClr val="14161C"/>
+                </a:solidFill>
+                <a:latin typeface="Be Vietnam Pro" pitchFamily="34" charset="0"/>
+                <a:ea typeface="Be Vietnam Pro" pitchFamily="34" charset="-122"/>
+                <a:cs typeface="Be Vietnam Pro" pitchFamily="34" charset="-120"/>
+              </a:rPr>
+              <a:t> app.log</a:t>
+            </a:r>
+            <a:endParaRPr lang="en-US" sz="2550" dirty="0"/>
           </a:p>
         </p:txBody>
       </p:sp>
@@ -7039,13 +7156,13 @@
               <a:buNone/>
             </a:pPr>
             <a:r>
-              <a:rPr lang="en-US" sz="4800" dirty="0" spc="5" kern="0">
+              <a:rPr lang="en-US" sz="4800" dirty="0" spc="1" kern="0">
                 <a:solidFill>
                   <a:srgbClr val="E8472B"/>
                 </a:solidFill>
-                <a:latin typeface="JetBrains Mono ExtraBold" pitchFamily="34" charset="0"/>
-                <a:ea typeface="JetBrains Mono ExtraBold" pitchFamily="34" charset="-122"/>
-                <a:cs typeface="JetBrains Mono ExtraBold" pitchFamily="34" charset="-120"/>
+                <a:latin typeface="Be Vietnam Pro ExtraBold" pitchFamily="34" charset="0"/>
+                <a:ea typeface="Be Vietnam Pro ExtraBold" pitchFamily="34" charset="-122"/>
+                <a:cs typeface="Be Vietnam Pro ExtraBold" pitchFamily="34" charset="-120"/>
               </a:rPr>
               <a:t>|</a:t>
             </a:r>
@@ -7087,39 +7204,39 @@
               <a:buNone/>
             </a:pPr>
             <a:r>
-              <a:rPr lang="en-US" sz="2400" b="1" dirty="0" spc="3" kern="0">
+              <a:rPr lang="en-US" sz="2550" b="1" dirty="0" spc="-17" kern="0">
                 <a:solidFill>
                   <a:srgbClr val="F3EEE3"/>
                 </a:solidFill>
-                <a:latin typeface="JetBrains Mono" pitchFamily="34" charset="0"/>
-                <a:ea typeface="JetBrains Mono" pitchFamily="34" charset="-122"/>
-                <a:cs typeface="JetBrains Mono" pitchFamily="34" charset="-120"/>
+                <a:latin typeface="Be Vietnam Pro" pitchFamily="34" charset="0"/>
+                <a:ea typeface="Be Vietnam Pro" pitchFamily="34" charset="-122"/>
+                <a:cs typeface="Be Vietnam Pro" pitchFamily="34" charset="-120"/>
               </a:rPr>
               <a:t>grep</a:t>
             </a:r>
             <a:r>
-              <a:rPr lang="en-US" sz="2400" b="1" dirty="0" spc="2" kern="0">
+              <a:rPr lang="en-US" sz="2550" b="1" dirty="0" spc="-13" kern="0">
                 <a:solidFill>
                   <a:srgbClr val="F3EEE3"/>
                 </a:solidFill>
-                <a:latin typeface="JetBrains Mono" pitchFamily="34" charset="0"/>
-                <a:ea typeface="JetBrains Mono" pitchFamily="34" charset="-122"/>
-                <a:cs typeface="JetBrains Mono" pitchFamily="34" charset="-120"/>
+                <a:latin typeface="Be Vietnam Pro" pitchFamily="34" charset="0"/>
+                <a:ea typeface="Be Vietnam Pro" pitchFamily="34" charset="-122"/>
+                <a:cs typeface="Be Vietnam Pro" pitchFamily="34" charset="-120"/>
               </a:rPr>
               <a:t> --line-buffered</a:t>
             </a:r>
             <a:r>
-              <a:rPr lang="en-US" sz="2400" b="1" dirty="0" spc="3" kern="0">
+              <a:rPr lang="en-US" sz="2550" b="1" dirty="0" spc="-10" kern="0">
                 <a:solidFill>
                   <a:srgbClr val="F3EEE3"/>
                 </a:solidFill>
-                <a:latin typeface="JetBrains Mono" pitchFamily="34" charset="0"/>
-                <a:ea typeface="JetBrains Mono" pitchFamily="34" charset="-122"/>
-                <a:cs typeface="JetBrains Mono" pitchFamily="34" charset="-120"/>
+                <a:latin typeface="Be Vietnam Pro" pitchFamily="34" charset="0"/>
+                <a:ea typeface="Be Vietnam Pro" pitchFamily="34" charset="-122"/>
+                <a:cs typeface="Be Vietnam Pro" pitchFamily="34" charset="-120"/>
               </a:rPr>
               <a:t> "ERROR"</a:t>
             </a:r>
-            <a:endParaRPr lang="en-US" sz="2400" dirty="0"/>
+            <a:endParaRPr lang="en-US" sz="2550" dirty="0"/>
           </a:p>
         </p:txBody>
       </p:sp>
@@ -7220,13 +7337,13 @@
               <a:buNone/>
             </a:pPr>
             <a:r>
-              <a:rPr lang="en-US" sz="4800" dirty="0" spc="5" kern="0">
+              <a:rPr lang="en-US" sz="4800" dirty="0" spc="1" kern="0">
                 <a:solidFill>
                   <a:srgbClr val="E8472B"/>
                 </a:solidFill>
-                <a:latin typeface="JetBrains Mono ExtraBold" pitchFamily="34" charset="0"/>
-                <a:ea typeface="JetBrains Mono ExtraBold" pitchFamily="34" charset="-122"/>
-                <a:cs typeface="JetBrains Mono ExtraBold" pitchFamily="34" charset="-120"/>
+                <a:latin typeface="Be Vietnam Pro ExtraBold" pitchFamily="34" charset="0"/>
+                <a:ea typeface="Be Vietnam Pro ExtraBold" pitchFamily="34" charset="-122"/>
+                <a:cs typeface="Be Vietnam Pro ExtraBold" pitchFamily="34" charset="-120"/>
               </a:rPr>
               <a:t>|</a:t>
             </a:r>
@@ -7268,28 +7385,17 @@
               <a:buNone/>
             </a:pPr>
             <a:r>
-              <a:rPr lang="en-US" sz="2400" b="1" dirty="0" spc="3" kern="0">
+              <a:rPr lang="en-US" sz="2550" b="1" dirty="0" spc="-9" kern="0">
                 <a:solidFill>
                   <a:srgbClr val="14161C"/>
                 </a:solidFill>
-                <a:latin typeface="JetBrains Mono" pitchFamily="34" charset="0"/>
-                <a:ea typeface="JetBrains Mono" pitchFamily="34" charset="-122"/>
-                <a:cs typeface="JetBrains Mono" pitchFamily="34" charset="-120"/>
-              </a:rPr>
-              <a:t>tee</a:t>
-            </a:r>
-            <a:r>
-              <a:rPr lang="en-US" sz="2400" b="1" dirty="0" spc="2" kern="0">
-                <a:solidFill>
-                  <a:srgbClr val="14161C"/>
-                </a:solidFill>
-                <a:latin typeface="JetBrains Mono" pitchFamily="34" charset="0"/>
-                <a:ea typeface="JetBrains Mono" pitchFamily="34" charset="-122"/>
-                <a:cs typeface="JetBrains Mono" pitchFamily="34" charset="-120"/>
-              </a:rPr>
-              <a:t> errors.log</a:t>
-            </a:r>
-            <a:endParaRPr lang="en-US" sz="2400" dirty="0"/>
+                <a:latin typeface="Be Vietnam Pro" pitchFamily="34" charset="0"/>
+                <a:ea typeface="Be Vietnam Pro" pitchFamily="34" charset="-122"/>
+                <a:cs typeface="Be Vietnam Pro" pitchFamily="34" charset="-120"/>
+              </a:rPr>
+              <a:t>tee errors.log</a:t>
+            </a:r>
+            <a:endParaRPr lang="en-US" sz="2550" dirty="0"/>
           </a:p>
         </p:txBody>
       </p:sp>
@@ -8376,68 +8482,68 @@
               <a:buNone/>
             </a:pPr>
             <a:r>
-              <a:rPr lang="en-US" sz="2850" b="1" dirty="0" spc="-2" kern="0">
+              <a:rPr lang="en-US" sz="2850" b="1" dirty="0" spc="-12" kern="0">
                 <a:solidFill>
                   <a:srgbClr val="F3EEE3"/>
                 </a:solidFill>
-                <a:latin typeface="JetBrains Mono" pitchFamily="34" charset="0"/>
-                <a:ea typeface="JetBrains Mono" pitchFamily="34" charset="-122"/>
-                <a:cs typeface="JetBrains Mono" pitchFamily="34" charset="-120"/>
+                <a:latin typeface="Be Vietnam Pro" pitchFamily="34" charset="0"/>
+                <a:ea typeface="Be Vietnam Pro" pitchFamily="34" charset="-122"/>
+                <a:cs typeface="Be Vietnam Pro" pitchFamily="34" charset="-120"/>
               </a:rPr>
               <a:t>jq</a:t>
             </a:r>
             <a:r>
+              <a:rPr lang="en-US" sz="2850" b="1" dirty="0" spc="3" kern="0">
+                <a:solidFill>
+                  <a:srgbClr val="F3EEE3"/>
+                </a:solidFill>
+                <a:latin typeface="Be Vietnam Pro" pitchFamily="34" charset="0"/>
+                <a:ea typeface="Be Vietnam Pro" pitchFamily="34" charset="-122"/>
+                <a:cs typeface="Be Vietnam Pro" pitchFamily="34" charset="-120"/>
+              </a:rPr>
+              <a:t> -r</a:t>
+            </a:r>
+            <a:r>
+              <a:rPr lang="en-US" sz="2850" b="1" dirty="0" spc="-12" kern="0">
+                <a:solidFill>
+                  <a:srgbClr val="F3EEE3"/>
+                </a:solidFill>
+                <a:latin typeface="Be Vietnam Pro" pitchFamily="34" charset="0"/>
+                <a:ea typeface="Be Vietnam Pro" pitchFamily="34" charset="-122"/>
+                <a:cs typeface="Be Vietnam Pro" pitchFamily="34" charset="-120"/>
+              </a:rPr>
+              <a:t> 'select(.level=="error")</a:t>
+            </a:r>
+            <a:r>
+              <a:rPr lang="en-US" sz="2850" b="1" dirty="0" spc="2" kern="0">
+                <a:solidFill>
+                  <a:srgbClr val="F3EEE3"/>
+                </a:solidFill>
+                <a:latin typeface="Be Vietnam Pro" pitchFamily="34" charset="0"/>
+                <a:ea typeface="Be Vietnam Pro" pitchFamily="34" charset="-122"/>
+                <a:cs typeface="Be Vietnam Pro" pitchFamily="34" charset="-120"/>
+              </a:rPr>
+              <a:t> |</a:t>
+            </a:r>
+            <a:r>
               <a:rPr lang="en-US" sz="2850" b="1" dirty="0" spc="-3" kern="0">
                 <a:solidFill>
                   <a:srgbClr val="F3EEE3"/>
                 </a:solidFill>
-                <a:latin typeface="JetBrains Mono" pitchFamily="34" charset="0"/>
-                <a:ea typeface="JetBrains Mono" pitchFamily="34" charset="-122"/>
-                <a:cs typeface="JetBrains Mono" pitchFamily="34" charset="-120"/>
-              </a:rPr>
-              <a:t> -r</a:t>
-            </a:r>
-            <a:r>
-              <a:rPr lang="en-US" sz="2850" b="1" dirty="0" spc="-2" kern="0">
+                <a:latin typeface="Be Vietnam Pro" pitchFamily="34" charset="0"/>
+                <a:ea typeface="Be Vietnam Pro" pitchFamily="34" charset="-122"/>
+                <a:cs typeface="Be Vietnam Pro" pitchFamily="34" charset="-120"/>
+              </a:rPr>
+              <a:t> .message'</a:t>
+            </a:r>
+            <a:r>
+              <a:rPr lang="en-US" sz="2850" b="1" dirty="0" spc="-1" kern="0">
                 <a:solidFill>
                   <a:srgbClr val="F3EEE3"/>
                 </a:solidFill>
-                <a:latin typeface="JetBrains Mono" pitchFamily="34" charset="0"/>
-                <a:ea typeface="JetBrains Mono" pitchFamily="34" charset="-122"/>
-                <a:cs typeface="JetBrains Mono" pitchFamily="34" charset="-120"/>
-              </a:rPr>
-              <a:t> 'select(.level=="error")</a:t>
-            </a:r>
-            <a:r>
-              <a:rPr lang="en-US" sz="2850" b="1" dirty="0" spc="-8" kern="0">
-                <a:solidFill>
-                  <a:srgbClr val="F3EEE3"/>
-                </a:solidFill>
-                <a:latin typeface="JetBrains Mono" pitchFamily="34" charset="0"/>
-                <a:ea typeface="JetBrains Mono" pitchFamily="34" charset="-122"/>
-                <a:cs typeface="JetBrains Mono" pitchFamily="34" charset="-120"/>
-              </a:rPr>
-              <a:t> |</a:t>
-            </a:r>
-            <a:r>
-              <a:rPr lang="en-US" sz="2850" b="1" dirty="0" spc="-3" kern="0">
-                <a:solidFill>
-                  <a:srgbClr val="F3EEE3"/>
-                </a:solidFill>
-                <a:latin typeface="JetBrains Mono" pitchFamily="34" charset="0"/>
-                <a:ea typeface="JetBrains Mono" pitchFamily="34" charset="-122"/>
-                <a:cs typeface="JetBrains Mono" pitchFamily="34" charset="-120"/>
-              </a:rPr>
-              <a:t> .message'</a:t>
-            </a:r>
-            <a:r>
-              <a:rPr lang="en-US" sz="2850" b="1" dirty="0" spc="-2" kern="0">
-                <a:solidFill>
-                  <a:srgbClr val="F3EEE3"/>
-                </a:solidFill>
-                <a:latin typeface="JetBrains Mono" pitchFamily="34" charset="0"/>
-                <a:ea typeface="JetBrains Mono" pitchFamily="34" charset="-122"/>
-                <a:cs typeface="JetBrains Mono" pitchFamily="34" charset="-120"/>
+                <a:latin typeface="Be Vietnam Pro" pitchFamily="34" charset="0"/>
+                <a:ea typeface="Be Vietnam Pro" pitchFamily="34" charset="-122"/>
+                <a:cs typeface="Be Vietnam Pro" pitchFamily="34" charset="-120"/>
               </a:rPr>
               <a:t> app.json</a:t>
             </a:r>
@@ -8536,13 +8642,13 @@
               <a:buNone/>
             </a:pPr>
             <a:r>
-              <a:rPr lang="en-US" sz="2550" b="1" dirty="0" spc="5" kern="0">
+              <a:rPr lang="en-US" sz="2550" b="1" dirty="0" spc="-14" kern="0">
                 <a:solidFill>
                   <a:srgbClr val="F3EEE3"/>
                 </a:solidFill>
-                <a:latin typeface="JetBrains Mono" pitchFamily="34" charset="0"/>
-                <a:ea typeface="JetBrains Mono" pitchFamily="34" charset="-122"/>
-                <a:cs typeface="JetBrains Mono" pitchFamily="34" charset="-120"/>
+                <a:latin typeface="Be Vietnam Pro" pitchFamily="34" charset="0"/>
+                <a:ea typeface="Be Vietnam Pro" pitchFamily="34" charset="-122"/>
+                <a:cs typeface="Be Vietnam Pro" pitchFamily="34" charset="-120"/>
               </a:rPr>
               <a:t>{"level":"error","message":"..."}</a:t>
             </a:r>
@@ -8724,13 +8830,13 @@
               <a:buNone/>
             </a:pPr>
             <a:r>
-              <a:rPr lang="en-US" sz="2550" b="1" dirty="0" spc="5" kern="0">
+              <a:rPr lang="en-US" sz="2550" b="1" dirty="0" spc="-12" kern="0">
                 <a:solidFill>
                   <a:srgbClr val="F3EEE3"/>
                 </a:solidFill>
-                <a:latin typeface="JetBrains Mono" pitchFamily="34" charset="0"/>
-                <a:ea typeface="JetBrains Mono" pitchFamily="34" charset="-122"/>
-                <a:cs typeface="JetBrains Mono" pitchFamily="34" charset="-120"/>
+                <a:latin typeface="Be Vietnam Pro" pitchFamily="34" charset="0"/>
+                <a:ea typeface="Be Vietnam Pro" pitchFamily="34" charset="-122"/>
+                <a:cs typeface="Be Vietnam Pro" pitchFamily="34" charset="-120"/>
               </a:rPr>
               <a:t>select(.level=="error")</a:t>
             </a:r>
@@ -8945,13 +9051,13 @@
               <a:buNone/>
             </a:pPr>
             <a:r>
-              <a:rPr lang="en-US" sz="2550" b="1" dirty="0" spc="5" kern="0">
+              <a:rPr lang="en-US" sz="2550" b="1" dirty="0" spc="-6" kern="0">
                 <a:solidFill>
                   <a:srgbClr val="F3EEE3"/>
                 </a:solidFill>
-                <a:latin typeface="JetBrains Mono" pitchFamily="34" charset="0"/>
-                <a:ea typeface="JetBrains Mono" pitchFamily="34" charset="-122"/>
-                <a:cs typeface="JetBrains Mono" pitchFamily="34" charset="-120"/>
+                <a:latin typeface="Be Vietnam Pro" pitchFamily="34" charset="0"/>
+                <a:ea typeface="Be Vietnam Pro" pitchFamily="34" charset="-122"/>
+                <a:cs typeface="Be Vietnam Pro" pitchFamily="34" charset="-120"/>
               </a:rPr>
               <a:t>.message</a:t>
             </a:r>
@@ -9705,15 +9811,114 @@
               <a:buNone/>
             </a:pPr>
             <a:r>
-              <a:rPr lang="en-US" sz="2700" b="1" dirty="0" spc="-5" kern="0">
+              <a:rPr lang="en-US" sz="2700" b="1" dirty="0" spc="-16" kern="0">
                 <a:solidFill>
                   <a:srgbClr val="F3EEE3"/>
                 </a:solidFill>
-                <a:latin typeface="JetBrains Mono" pitchFamily="34" charset="0"/>
-                <a:ea typeface="JetBrains Mono" pitchFamily="34" charset="-122"/>
-                <a:cs typeface="JetBrains Mono" pitchFamily="34" charset="-120"/>
-              </a:rPr>
-              <a:t>awk '{s += $5; n++} END {if (n) print s/n}' latency.log</a:t>
+                <a:latin typeface="Be Vietnam Pro" pitchFamily="34" charset="0"/>
+                <a:ea typeface="Be Vietnam Pro" pitchFamily="34" charset="-122"/>
+                <a:cs typeface="Be Vietnam Pro" pitchFamily="34" charset="-120"/>
+              </a:rPr>
+              <a:t>awk</a:t>
+            </a:r>
+            <a:r>
+              <a:rPr lang="en-US" sz="2700" b="1" dirty="0" spc="-2" kern="0">
+                <a:solidFill>
+                  <a:srgbClr val="F3EEE3"/>
+                </a:solidFill>
+                <a:latin typeface="Be Vietnam Pro" pitchFamily="34" charset="0"/>
+                <a:ea typeface="Be Vietnam Pro" pitchFamily="34" charset="-122"/>
+                <a:cs typeface="Be Vietnam Pro" pitchFamily="34" charset="-120"/>
+              </a:rPr>
+              <a:t> '{s</a:t>
+            </a:r>
+            <a:r>
+              <a:rPr lang="en-US" sz="2700" b="1" dirty="0" spc="-1" kern="0">
+                <a:solidFill>
+                  <a:srgbClr val="F3EEE3"/>
+                </a:solidFill>
+                <a:latin typeface="Be Vietnam Pro" pitchFamily="34" charset="0"/>
+                <a:ea typeface="Be Vietnam Pro" pitchFamily="34" charset="-122"/>
+                <a:cs typeface="Be Vietnam Pro" pitchFamily="34" charset="-120"/>
+              </a:rPr>
+              <a:t> +=</a:t>
+            </a:r>
+            <a:r>
+              <a:rPr lang="en-US" sz="2700" b="1" dirty="0" spc="0" kern="0">
+                <a:solidFill>
+                  <a:srgbClr val="F3EEE3"/>
+                </a:solidFill>
+                <a:latin typeface="Be Vietnam Pro" pitchFamily="34" charset="0"/>
+                <a:ea typeface="Be Vietnam Pro" pitchFamily="34" charset="-122"/>
+                <a:cs typeface="Be Vietnam Pro" pitchFamily="34" charset="-120"/>
+              </a:rPr>
+              <a:t> $5;</a:t>
+            </a:r>
+            <a:r>
+              <a:rPr lang="en-US" sz="2700" b="1" dirty="0" spc="-2" kern="0">
+                <a:solidFill>
+                  <a:srgbClr val="F3EEE3"/>
+                </a:solidFill>
+                <a:latin typeface="Be Vietnam Pro" pitchFamily="34" charset="0"/>
+                <a:ea typeface="Be Vietnam Pro" pitchFamily="34" charset="-122"/>
+                <a:cs typeface="Be Vietnam Pro" pitchFamily="34" charset="-120"/>
+              </a:rPr>
+              <a:t> n++} END</a:t>
+            </a:r>
+            <a:r>
+              <a:rPr lang="en-US" sz="2700" b="1" dirty="0" spc="-1" kern="0">
+                <a:solidFill>
+                  <a:srgbClr val="F3EEE3"/>
+                </a:solidFill>
+                <a:latin typeface="Be Vietnam Pro" pitchFamily="34" charset="0"/>
+                <a:ea typeface="Be Vietnam Pro" pitchFamily="34" charset="-122"/>
+                <a:cs typeface="Be Vietnam Pro" pitchFamily="34" charset="-120"/>
+              </a:rPr>
+              <a:t> {if</a:t>
+            </a:r>
+            <a:r>
+              <a:rPr lang="en-US" sz="2700" b="1" dirty="0" spc="-2" kern="0">
+                <a:solidFill>
+                  <a:srgbClr val="F3EEE3"/>
+                </a:solidFill>
+                <a:latin typeface="Be Vietnam Pro" pitchFamily="34" charset="0"/>
+                <a:ea typeface="Be Vietnam Pro" pitchFamily="34" charset="-122"/>
+                <a:cs typeface="Be Vietnam Pro" pitchFamily="34" charset="-120"/>
+              </a:rPr>
+              <a:t> (n)</a:t>
+            </a:r>
+            <a:r>
+              <a:rPr lang="en-US" sz="2700" b="1" dirty="0" spc="2" kern="0">
+                <a:solidFill>
+                  <a:srgbClr val="F3EEE3"/>
+                </a:solidFill>
+                <a:latin typeface="Be Vietnam Pro" pitchFamily="34" charset="0"/>
+                <a:ea typeface="Be Vietnam Pro" pitchFamily="34" charset="-122"/>
+                <a:cs typeface="Be Vietnam Pro" pitchFamily="34" charset="-120"/>
+              </a:rPr>
+              <a:t> print</a:t>
+            </a:r>
+            <a:r>
+              <a:rPr lang="en-US" sz="2700" b="1" dirty="0" spc="-2" kern="0">
+                <a:solidFill>
+                  <a:srgbClr val="F3EEE3"/>
+                </a:solidFill>
+                <a:latin typeface="Be Vietnam Pro" pitchFamily="34" charset="0"/>
+                <a:ea typeface="Be Vietnam Pro" pitchFamily="34" charset="-122"/>
+                <a:cs typeface="Be Vietnam Pro" pitchFamily="34" charset="-120"/>
+              </a:rPr>
+              <a:t> s/n}'</a:t>
+            </a:r>
+            <a:r>
+              <a:rPr lang="en-US" sz="2700" b="1" dirty="0" spc="-14" kern="0">
+                <a:solidFill>
+                  <a:srgbClr val="F3EEE3"/>
+                </a:solidFill>
+                <a:latin typeface="Be Vietnam Pro" pitchFamily="34" charset="0"/>
+                <a:ea typeface="Be Vietnam Pro" pitchFamily="34" charset="-122"/>
+                <a:cs typeface="Be Vietnam Pro" pitchFamily="34" charset="-120"/>
+              </a:rPr>
+              <a:t> latency.log</a:t>
             </a:r>
             <a:endParaRPr lang="en-US" sz="2700" dirty="0"/>
           </a:p>
@@ -13692,13 +13897,13 @@
               <a:buNone/>
             </a:pPr>
             <a:r>
-              <a:rPr lang="en-US" sz="3900" dirty="0" spc="2" kern="0">
+              <a:rPr lang="en-US" sz="3900" dirty="0" kern="0">
                 <a:solidFill>
                   <a:srgbClr val="1F3FD1"/>
                 </a:solidFill>
-                <a:latin typeface="JetBrains Mono ExtraBold" pitchFamily="34" charset="0"/>
-                <a:ea typeface="JetBrains Mono ExtraBold" pitchFamily="34" charset="-122"/>
-                <a:cs typeface="JetBrains Mono ExtraBold" pitchFamily="34" charset="-120"/>
+                <a:latin typeface="Be Vietnam Pro ExtraBold" pitchFamily="34" charset="0"/>
+                <a:ea typeface="Be Vietnam Pro ExtraBold" pitchFamily="34" charset="-122"/>
+                <a:cs typeface="Be Vietnam Pro ExtraBold" pitchFamily="34" charset="-120"/>
               </a:rPr>
               <a:t>-B</a:t>
             </a:r>
@@ -13847,13 +14052,13 @@
               <a:buNone/>
             </a:pPr>
             <a:r>
-              <a:rPr lang="en-US" sz="3900" dirty="0" spc="2" kern="0">
+              <a:rPr lang="en-US" sz="3900" dirty="0" spc="3" kern="0">
                 <a:solidFill>
                   <a:srgbClr val="1F3FD1"/>
                 </a:solidFill>
-                <a:latin typeface="JetBrains Mono ExtraBold" pitchFamily="34" charset="0"/>
-                <a:ea typeface="JetBrains Mono ExtraBold" pitchFamily="34" charset="-122"/>
-                <a:cs typeface="JetBrains Mono ExtraBold" pitchFamily="34" charset="-120"/>
+                <a:latin typeface="Be Vietnam Pro ExtraBold" pitchFamily="34" charset="0"/>
+                <a:ea typeface="Be Vietnam Pro ExtraBold" pitchFamily="34" charset="-122"/>
+                <a:cs typeface="Be Vietnam Pro ExtraBold" pitchFamily="34" charset="-120"/>
               </a:rPr>
               <a:t>-A</a:t>
             </a:r>
@@ -14077,13 +14282,13 @@
               <a:buNone/>
             </a:pPr>
             <a:r>
-              <a:rPr lang="en-US" sz="3900" dirty="0" spc="2" kern="0">
+              <a:rPr lang="en-US" sz="3900" dirty="0" spc="-2" kern="0">
                 <a:solidFill>
                   <a:srgbClr val="E8472B"/>
                 </a:solidFill>
-                <a:latin typeface="JetBrains Mono ExtraBold" pitchFamily="34" charset="0"/>
-                <a:ea typeface="JetBrains Mono ExtraBold" pitchFamily="34" charset="-122"/>
-                <a:cs typeface="JetBrains Mono ExtraBold" pitchFamily="34" charset="-120"/>
+                <a:latin typeface="Be Vietnam Pro ExtraBold" pitchFamily="34" charset="0"/>
+                <a:ea typeface="Be Vietnam Pro ExtraBold" pitchFamily="34" charset="-122"/>
+                <a:cs typeface="Be Vietnam Pro ExtraBold" pitchFamily="34" charset="-120"/>
               </a:rPr>
               <a:t>-C</a:t>
             </a:r>
